--- a/lessons/5-3/slides.pptx
+++ b/lessons/5-3/slides.pptx
@@ -11023,7 +11023,7 @@
       </p:sp>
       <p:sp>
         <p:nvSpPr>
-          <p:cNvPr id="20" name="Shape 18"/>
+          <p:cNvPr id="20" name="Text 18"/>
           <p:cNvSpPr/>
           <p:nvPr/>
         </p:nvSpPr>
@@ -11044,33 +11044,7 @@
             <a:solidFill>
               <a:srgbClr val="D6DBDF"/>
             </a:solidFill>
-            <a:prstDash val="solid"/>
           </a:ln>
-          <a:effectLst>
-            <a:outerShdw sx="100000" sy="100000" kx="0" ky="0" algn="bl" rotWithShape="0" blurRad="50800" dist="12700" dir="5400000">
-              <a:srgbClr val="1C2E42">
-                <a:alpha val="10000"/>
-              </a:srgbClr>
-            </a:outerShdw>
-          </a:effectLst>
-        </p:spPr>
-      </p:sp>
-      <p:sp>
-        <p:nvSpPr>
-          <p:cNvPr id="21" name="Text 19"/>
-          <p:cNvSpPr/>
-          <p:nvPr/>
-        </p:nvSpPr>
-        <p:spPr>
-          <a:xfrm>
-            <a:off x="685800" y="1481328"/>
-            <a:ext cx="1447800" cy="384048"/>
-          </a:xfrm>
-          <a:prstGeom prst="rect">
-            <a:avLst/>
-          </a:prstGeom>
-          <a:noFill/>
-          <a:ln/>
         </p:spPr>
         <p:txBody>
           <a:bodyPr wrap="square" rtlCol="0" anchor="ctr"/>
@@ -11080,7 +11054,7 @@
               <a:buNone/>
             </a:pPr>
             <a:r>
-              <a:rPr lang="en-US" sz="900" dirty="0">
+              <a:rPr lang="en-US" sz="900" b="1" dirty="0">
                 <a:solidFill>
                   <a:srgbClr val="17324D"/>
                 </a:solidFill>
@@ -11096,7 +11070,7 @@
       </p:sp>
       <p:sp>
         <p:nvSpPr>
-          <p:cNvPr id="22" name="Shape 20"/>
+          <p:cNvPr id="21" name="Text 19"/>
           <p:cNvSpPr/>
           <p:nvPr/>
         </p:nvSpPr>
@@ -11117,33 +11091,7 @@
             <a:solidFill>
               <a:srgbClr val="D6DBDF"/>
             </a:solidFill>
-            <a:prstDash val="solid"/>
           </a:ln>
-          <a:effectLst>
-            <a:outerShdw sx="100000" sy="100000" kx="0" ky="0" algn="bl" rotWithShape="0" blurRad="50800" dist="12700" dir="5400000">
-              <a:srgbClr val="1C2E42">
-                <a:alpha val="10000"/>
-              </a:srgbClr>
-            </a:outerShdw>
-          </a:effectLst>
-        </p:spPr>
-      </p:sp>
-      <p:sp>
-        <p:nvSpPr>
-          <p:cNvPr id="23" name="Text 21"/>
-          <p:cNvSpPr/>
-          <p:nvPr/>
-        </p:nvSpPr>
-        <p:spPr>
-          <a:xfrm>
-            <a:off x="2453640" y="1481328"/>
-            <a:ext cx="1447800" cy="384048"/>
-          </a:xfrm>
-          <a:prstGeom prst="rect">
-            <a:avLst/>
-          </a:prstGeom>
-          <a:noFill/>
-          <a:ln/>
         </p:spPr>
         <p:txBody>
           <a:bodyPr wrap="square" rtlCol="0" anchor="ctr"/>
@@ -11153,7 +11101,7 @@
               <a:buNone/>
             </a:pPr>
             <a:r>
-              <a:rPr lang="en-US" sz="900" dirty="0">
+              <a:rPr lang="en-US" sz="900" b="1" dirty="0">
                 <a:solidFill>
                   <a:srgbClr val="17324D"/>
                 </a:solidFill>
@@ -11169,7 +11117,7 @@
       </p:sp>
       <p:sp>
         <p:nvSpPr>
-          <p:cNvPr id="24" name="Shape 22"/>
+          <p:cNvPr id="22" name="Text 20"/>
           <p:cNvSpPr/>
           <p:nvPr/>
         </p:nvSpPr>
@@ -11190,33 +11138,7 @@
             <a:solidFill>
               <a:srgbClr val="D6DBDF"/>
             </a:solidFill>
-            <a:prstDash val="solid"/>
           </a:ln>
-          <a:effectLst>
-            <a:outerShdw sx="100000" sy="100000" kx="0" ky="0" algn="bl" rotWithShape="0" blurRad="50800" dist="12700" dir="5400000">
-              <a:srgbClr val="1C2E42">
-                <a:alpha val="10000"/>
-              </a:srgbClr>
-            </a:outerShdw>
-          </a:effectLst>
-        </p:spPr>
-      </p:sp>
-      <p:sp>
-        <p:nvSpPr>
-          <p:cNvPr id="25" name="Text 23"/>
-          <p:cNvSpPr/>
-          <p:nvPr/>
-        </p:nvSpPr>
-        <p:spPr>
-          <a:xfrm>
-            <a:off x="4221480" y="1481328"/>
-            <a:ext cx="1447800" cy="384048"/>
-          </a:xfrm>
-          <a:prstGeom prst="rect">
-            <a:avLst/>
-          </a:prstGeom>
-          <a:noFill/>
-          <a:ln/>
         </p:spPr>
         <p:txBody>
           <a:bodyPr wrap="square" rtlCol="0" anchor="ctr"/>
@@ -11226,7 +11148,7 @@
               <a:buNone/>
             </a:pPr>
             <a:r>
-              <a:rPr lang="en-US" sz="900" dirty="0">
+              <a:rPr lang="en-US" sz="900" b="1" dirty="0">
                 <a:solidFill>
                   <a:srgbClr val="17324D"/>
                 </a:solidFill>
@@ -11242,7 +11164,7 @@
       </p:sp>
       <p:sp>
         <p:nvSpPr>
-          <p:cNvPr id="26" name="Shape 24"/>
+          <p:cNvPr id="23" name="Text 21"/>
           <p:cNvSpPr/>
           <p:nvPr/>
         </p:nvSpPr>
@@ -11263,33 +11185,7 @@
             <a:solidFill>
               <a:srgbClr val="D6DBDF"/>
             </a:solidFill>
-            <a:prstDash val="solid"/>
           </a:ln>
-          <a:effectLst>
-            <a:outerShdw sx="100000" sy="100000" kx="0" ky="0" algn="bl" rotWithShape="0" blurRad="50800" dist="12700" dir="5400000">
-              <a:srgbClr val="1C2E42">
-                <a:alpha val="10000"/>
-              </a:srgbClr>
-            </a:outerShdw>
-          </a:effectLst>
-        </p:spPr>
-      </p:sp>
-      <p:sp>
-        <p:nvSpPr>
-          <p:cNvPr id="27" name="Text 25"/>
-          <p:cNvSpPr/>
-          <p:nvPr/>
-        </p:nvSpPr>
-        <p:spPr>
-          <a:xfrm>
-            <a:off x="685800" y="1975104"/>
-            <a:ext cx="1447800" cy="384048"/>
-          </a:xfrm>
-          <a:prstGeom prst="rect">
-            <a:avLst/>
-          </a:prstGeom>
-          <a:noFill/>
-          <a:ln/>
         </p:spPr>
         <p:txBody>
           <a:bodyPr wrap="square" rtlCol="0" anchor="ctr"/>
@@ -11299,7 +11195,7 @@
               <a:buNone/>
             </a:pPr>
             <a:r>
-              <a:rPr lang="en-US" sz="900" dirty="0">
+              <a:rPr lang="en-US" sz="900" b="1" dirty="0">
                 <a:solidFill>
                   <a:srgbClr val="17324D"/>
                 </a:solidFill>
@@ -11315,7 +11211,7 @@
       </p:sp>
       <p:sp>
         <p:nvSpPr>
-          <p:cNvPr id="28" name="Shape 26"/>
+          <p:cNvPr id="24" name="Shape 22"/>
           <p:cNvSpPr/>
           <p:nvPr/>
         </p:nvSpPr>
@@ -11349,7 +11245,7 @@
       </p:sp>
       <p:sp>
         <p:nvSpPr>
-          <p:cNvPr id="29" name="Text 27"/>
+          <p:cNvPr id="25" name="Text 23"/>
           <p:cNvSpPr/>
           <p:nvPr/>
         </p:nvSpPr>
@@ -11390,7 +11286,7 @@
       </p:sp>
       <p:sp>
         <p:nvSpPr>
-          <p:cNvPr id="30" name="Shape 28"/>
+          <p:cNvPr id="26" name="Shape 24"/>
           <p:cNvSpPr/>
           <p:nvPr/>
         </p:nvSpPr>
@@ -11424,7 +11320,7 @@
       </p:sp>
       <p:sp>
         <p:nvSpPr>
-          <p:cNvPr id="31" name="Text 29"/>
+          <p:cNvPr id="27" name="Text 25"/>
           <p:cNvSpPr/>
           <p:nvPr/>
         </p:nvSpPr>
@@ -11465,7 +11361,7 @@
       </p:sp>
       <p:sp>
         <p:nvSpPr>
-          <p:cNvPr id="32" name="Shape 30"/>
+          <p:cNvPr id="28" name="Shape 26"/>
           <p:cNvSpPr/>
           <p:nvPr/>
         </p:nvSpPr>
@@ -11499,7 +11395,7 @@
       </p:sp>
       <p:sp>
         <p:nvSpPr>
-          <p:cNvPr id="33" name="Text 31"/>
+          <p:cNvPr id="29" name="Text 27"/>
           <p:cNvSpPr/>
           <p:nvPr/>
         </p:nvSpPr>
@@ -11540,7 +11436,7 @@
       </p:sp>
       <p:sp>
         <p:nvSpPr>
-          <p:cNvPr id="34" name="Text 32"/>
+          <p:cNvPr id="30" name="Text 28"/>
           <p:cNvSpPr/>
           <p:nvPr/>
         </p:nvSpPr>
@@ -11579,7 +11475,7 @@
       </p:sp>
       <p:sp>
         <p:nvSpPr>
-          <p:cNvPr id="35" name="Shape 33"/>
+          <p:cNvPr id="31" name="Shape 29"/>
           <p:cNvSpPr/>
           <p:nvPr/>
         </p:nvSpPr>
@@ -11602,7 +11498,7 @@
       </p:sp>
       <p:sp>
         <p:nvSpPr>
-          <p:cNvPr id="36" name="Shape 34"/>
+          <p:cNvPr id="32" name="Shape 30"/>
           <p:cNvSpPr/>
           <p:nvPr/>
         </p:nvSpPr>
@@ -11625,7 +11521,7 @@
       </p:sp>
       <p:sp>
         <p:nvSpPr>
-          <p:cNvPr id="37" name="Shape 35"/>
+          <p:cNvPr id="33" name="Shape 31"/>
           <p:cNvSpPr/>
           <p:nvPr/>
         </p:nvSpPr>
@@ -11648,7 +11544,7 @@
       </p:sp>
       <p:sp>
         <p:nvSpPr>
-          <p:cNvPr id="38" name="Shape 36"/>
+          <p:cNvPr id="34" name="Shape 32"/>
           <p:cNvSpPr/>
           <p:nvPr/>
         </p:nvSpPr>
@@ -11671,7 +11567,7 @@
       </p:sp>
       <p:sp>
         <p:nvSpPr>
-          <p:cNvPr id="39" name="Shape 37"/>
+          <p:cNvPr id="35" name="Shape 33"/>
           <p:cNvSpPr/>
           <p:nvPr/>
         </p:nvSpPr>

--- a/lessons/5-3/slides.pptx
+++ b/lessons/5-3/slides.pptx
@@ -2495,7 +2495,7 @@
                 <a:ea typeface="Outfit" pitchFamily="34" charset="-122"/>
                 <a:cs typeface="Outfit" pitchFamily="34" charset="-120"/>
               </a:rPr>
-              <a:t>6.G.1</a:t>
+              <a:t>6.GR.1</a:t>
             </a:r>
             <a:endParaRPr lang="en-US" sz="1000" dirty="0"/>
           </a:p>
@@ -3218,7 +3218,7 @@
                 <a:ea typeface="Outfit" pitchFamily="34" charset="-122"/>
                 <a:cs typeface="Outfit" pitchFamily="34" charset="-120"/>
               </a:rPr>
-              <a:t>6.G.1</a:t>
+              <a:t>6.GR.1</a:t>
             </a:r>
             <a:endParaRPr lang="en-US" sz="900" dirty="0"/>
           </a:p>
@@ -4328,7 +4328,7 @@
                 <a:ea typeface="Outfit" pitchFamily="34" charset="-122"/>
                 <a:cs typeface="Outfit" pitchFamily="34" charset="-120"/>
               </a:rPr>
-              <a:t>6.G.1</a:t>
+              <a:t>6.GR.1</a:t>
             </a:r>
             <a:endParaRPr lang="en-US" sz="900" dirty="0"/>
           </a:p>
@@ -5664,7 +5664,7 @@
                 <a:ea typeface="Outfit" pitchFamily="34" charset="-122"/>
                 <a:cs typeface="Outfit" pitchFamily="34" charset="-120"/>
               </a:rPr>
-              <a:t>6.G.1</a:t>
+              <a:t>6.GR.1</a:t>
             </a:r>
             <a:endParaRPr lang="en-US" sz="900" dirty="0"/>
           </a:p>
@@ -6958,7 +6958,7 @@
                 <a:ea typeface="Outfit" pitchFamily="34" charset="-122"/>
                 <a:cs typeface="Outfit" pitchFamily="34" charset="-120"/>
               </a:rPr>
-              <a:t>6.G.1</a:t>
+              <a:t>6.GR.1</a:t>
             </a:r>
             <a:endParaRPr lang="en-US" sz="900" dirty="0"/>
           </a:p>
@@ -8020,7 +8020,7 @@
                 <a:ea typeface="Outfit" pitchFamily="34" charset="-122"/>
                 <a:cs typeface="Outfit" pitchFamily="34" charset="-120"/>
               </a:rPr>
-              <a:t>6.G.1</a:t>
+              <a:t>6.GR.1</a:t>
             </a:r>
             <a:endParaRPr lang="en-US" sz="900" dirty="0"/>
           </a:p>
@@ -8985,7 +8985,7 @@
                 <a:ea typeface="Outfit" pitchFamily="34" charset="-122"/>
                 <a:cs typeface="Outfit" pitchFamily="34" charset="-120"/>
               </a:rPr>
-              <a:t>6.G.1</a:t>
+              <a:t>6.GR.1</a:t>
             </a:r>
             <a:endParaRPr lang="en-US" sz="900" dirty="0"/>
           </a:p>
@@ -9902,7 +9902,7 @@
                 <a:ea typeface="Outfit" pitchFamily="34" charset="-122"/>
                 <a:cs typeface="Outfit" pitchFamily="34" charset="-120"/>
               </a:rPr>
-              <a:t>6.G.1</a:t>
+              <a:t>6.GR.1</a:t>
             </a:r>
             <a:endParaRPr lang="en-US" sz="900" dirty="0"/>
           </a:p>
@@ -11030,7 +11030,7 @@
                 <a:ea typeface="Outfit" pitchFamily="34" charset="-122"/>
                 <a:cs typeface="Outfit" pitchFamily="34" charset="-120"/>
               </a:rPr>
-              <a:t>6.G.1</a:t>
+              <a:t>6.GR.1</a:t>
             </a:r>
             <a:endParaRPr lang="en-US" sz="900" dirty="0"/>
           </a:p>
@@ -12463,7 +12463,7 @@
                 <a:ea typeface="Outfit" pitchFamily="34" charset="-122"/>
                 <a:cs typeface="Outfit" pitchFamily="34" charset="-120"/>
               </a:rPr>
-              <a:t>6.G.1</a:t>
+              <a:t>6.GR.1</a:t>
             </a:r>
             <a:endParaRPr lang="en-US" sz="900" dirty="0"/>
           </a:p>
@@ -13277,7 +13277,7 @@
                 <a:ea typeface="Outfit" pitchFamily="34" charset="-122"/>
                 <a:cs typeface="Outfit" pitchFamily="34" charset="-120"/>
               </a:rPr>
-              <a:t>6.G.1</a:t>
+              <a:t>6.GR.1</a:t>
             </a:r>
             <a:endParaRPr lang="en-US" sz="900" dirty="0"/>
           </a:p>
@@ -14384,7 +14384,7 @@
                 <a:ea typeface="Outfit" pitchFamily="34" charset="-122"/>
                 <a:cs typeface="Outfit" pitchFamily="34" charset="-120"/>
               </a:rPr>
-              <a:t>6.G.1</a:t>
+              <a:t>6.GR.1</a:t>
             </a:r>
             <a:endParaRPr lang="en-US" sz="900" dirty="0"/>
           </a:p>
@@ -15491,7 +15491,7 @@
                 <a:ea typeface="Outfit" pitchFamily="34" charset="-122"/>
                 <a:cs typeface="Outfit" pitchFamily="34" charset="-120"/>
               </a:rPr>
-              <a:t>6.G.1</a:t>
+              <a:t>6.GR.1</a:t>
             </a:r>
             <a:endParaRPr lang="en-US" sz="900" dirty="0"/>
           </a:p>
@@ -16598,7 +16598,7 @@
                 <a:ea typeface="Outfit" pitchFamily="34" charset="-122"/>
                 <a:cs typeface="Outfit" pitchFamily="34" charset="-120"/>
               </a:rPr>
-              <a:t>6.G.1</a:t>
+              <a:t>6.GR.1</a:t>
             </a:r>
             <a:endParaRPr lang="en-US" sz="900" dirty="0"/>
           </a:p>
@@ -17658,7 +17658,7 @@
                 <a:ea typeface="Outfit" pitchFamily="34" charset="-122"/>
                 <a:cs typeface="Outfit" pitchFamily="34" charset="-120"/>
               </a:rPr>
-              <a:t>6.G.1</a:t>
+              <a:t>6.GR.1</a:t>
             </a:r>
             <a:endParaRPr lang="en-US" sz="900" dirty="0"/>
           </a:p>
@@ -18646,7 +18646,7 @@
                 <a:ea typeface="Outfit" pitchFamily="34" charset="-122"/>
                 <a:cs typeface="Outfit" pitchFamily="34" charset="-120"/>
               </a:rPr>
-              <a:t>6.G.1</a:t>
+              <a:t>6.GR.1</a:t>
             </a:r>
             <a:endParaRPr lang="en-US" sz="900" dirty="0"/>
           </a:p>
@@ -20825,7 +20825,7 @@
                 <a:ea typeface="Outfit" pitchFamily="34" charset="-122"/>
                 <a:cs typeface="Outfit" pitchFamily="34" charset="-120"/>
               </a:rPr>
-              <a:t>6.G.1</a:t>
+              <a:t>6.GR.1</a:t>
             </a:r>
             <a:endParaRPr lang="en-US" sz="900" dirty="0"/>
           </a:p>

--- a/lessons/5-3/slides.pptx
+++ b/lessons/5-3/slides.pptx
@@ -694,7 +694,7 @@
           <a:p>
             <a:r>
               <a:rPr lang="en-US" dirty="0"/>
-              <a:t>Answer key — 14 × 9 = 126, then ½ × 126 = 63 sq m. The student added 14 + 9 = 23 instead of multiplying 14 × 9 = 126.</a:t>
+              <a:t>Answer key — The student forgot to multiply by ½. A = ½ × 16 × 7 = ½ × 112 = 56 sq m.</a:t>
             </a:r>
             <a:endParaRPr lang="en-US" dirty="0"/>
           </a:p>
@@ -2452,7 +2452,7 @@
                 <a:ea typeface="Outfit" pitchFamily="34" charset="-122"/>
                 <a:cs typeface="Outfit" pitchFamily="34" charset="-120"/>
               </a:rPr>
-              <a:t>Area of Triangles</a:t>
+              <a:t>Area of Trapezoids</a:t>
             </a:r>
             <a:endParaRPr lang="en-US" sz="3000" dirty="0"/>
           </a:p>
@@ -2534,7 +2534,7 @@
                 <a:ea typeface="Hanken Grotesk" pitchFamily="34" charset="-122"/>
                 <a:cs typeface="Hanken Grotesk" pitchFamily="34" charset="-120"/>
               </a:rPr>
-              <a:t>Unit 5  ·  Lesson 5-3</a:t>
+              <a:t>Unit 5  ·  Lesson 5-2</a:t>
             </a:r>
             <a:endParaRPr lang="en-US" sz="1000" dirty="0"/>
           </a:p>
@@ -2919,7 +2919,7 @@
                 <a:ea typeface="Hanken Grotesk" pitchFamily="34" charset="-122"/>
                 <a:cs typeface="Hanken Grotesk" pitchFamily="34" charset="-120"/>
               </a:rPr>
-              <a:t>I can find the area of a triangle using the formula A = ½ × base × height.</a:t>
+              <a:t>I can find the area of a trapezoid using the formula A = ½(b1 + b2) × h.</a:t>
             </a:r>
             <a:endParaRPr lang="en-US" sz="1100" dirty="0"/>
           </a:p>
@@ -3045,7 +3045,7 @@
                 <a:ea typeface="Hanken Grotesk" pitchFamily="34" charset="-122"/>
                 <a:cs typeface="Hanken Grotesk" pitchFamily="34" charset="-120"/>
               </a:rPr>
-              <a:t>I can explain my steps using the words base, height, area, and perpendicular.</a:t>
+              <a:t>I can explain my steps using the words trapezoid, base, height, and area.</a:t>
             </a:r>
             <a:endParaRPr lang="en-US" sz="1050" dirty="0"/>
           </a:p>
@@ -3437,7 +3437,7 @@
                 <a:ea typeface="Hanken Grotesk" pitchFamily="34" charset="-122"/>
                 <a:cs typeface="Hanken Grotesk" pitchFamily="34" charset="-120"/>
               </a:rPr>
-              <a:t>Reveal Math Grade 6  ·  Unit 5  ·  Lesson 5-3</a:t>
+              <a:t>Reveal Math Grade 6  ·  Unit 5  ·  Lesson 5-2</a:t>
             </a:r>
             <a:endParaRPr lang="en-US" sz="750" dirty="0"/>
           </a:p>
@@ -3549,7 +3549,7 @@
                 <a:ea typeface="Outfit" pitchFamily="34" charset="-122"/>
                 <a:cs typeface="Outfit" pitchFamily="34" charset="-120"/>
               </a:rPr>
-              <a:t>Plot the vertices of a triangle with base 12 and height 8 to visualize the garden. Place points at (0, 0), (12, 0), and (6, 8).</a:t>
+              <a:t>Plot the vertices of a trapezoid with bases of 8 and 4, and height of 5. Place points at (0, 0), (8, 0), (6, 5), and (2, 5).</a:t>
             </a:r>
             <a:endParaRPr lang="en-US" sz="1050" dirty="0"/>
           </a:p>
@@ -4040,7 +4040,7 @@
                 <a:ea typeface="Hanken Grotesk" pitchFamily="34" charset="-122"/>
                 <a:cs typeface="Hanken Grotesk" pitchFamily="34" charset="-120"/>
               </a:rPr>
-              <a:t>On the grid your triangle (base 12, height 8) fits inside a 12 by 8 rectangle. Why do we divide by 2 to find the triangle's area?</a:t>
+              <a:t>On the grid you copied the trapezoid (bases 8 and 4, height 5), flipped it, and joined it to the original. What shape formed, and how does that explain the 1/2 in the formula?</a:t>
             </a:r>
             <a:endParaRPr lang="en-US" sz="1000" dirty="0"/>
           </a:p>
@@ -4547,7 +4547,7 @@
                 <a:ea typeface="Hanken Grotesk" pitchFamily="34" charset="-122"/>
                 <a:cs typeface="Hanken Grotesk" pitchFamily="34" charset="-120"/>
               </a:rPr>
-              <a:t>Reveal Math Grade 6  ·  Unit 5  ·  Lesson 5-3</a:t>
+              <a:t>Reveal Math Grade 6  ·  Unit 5  ·  Lesson 5-2</a:t>
             </a:r>
             <a:endParaRPr lang="en-US" sz="750" dirty="0"/>
           </a:p>
@@ -4867,7 +4867,7 @@
                 <a:ea typeface="Hanken Grotesk" pitchFamily="34" charset="-122"/>
                 <a:cs typeface="Hanken Grotesk" pitchFamily="34" charset="-120"/>
               </a:rPr>
-              <a:t>Identify base and height:  </a:t>
+              <a:t>Identify the bases and height:  </a:t>
             </a:r>
             <a:pPr indent="0" marL="0">
               <a:buNone/>
@@ -4881,7 +4881,7 @@
                 <a:ea typeface="Courier New" pitchFamily="34" charset="-122"/>
                 <a:cs typeface="Courier New" pitchFamily="34" charset="-120"/>
               </a:rPr>
-              <a:t>b = 14 m, h = 9 m</a:t>
+              <a:t>b₁ = 10 m, b₂ = 6 m, h = 7 m</a:t>
             </a:r>
             <a:endParaRPr lang="en-US" sz="950" dirty="0"/>
           </a:p>
@@ -4948,7 +4948,7 @@
                 <a:ea typeface="Courier New" pitchFamily="34" charset="-122"/>
                 <a:cs typeface="Courier New" pitchFamily="34" charset="-120"/>
               </a:rPr>
-              <a:t>A = ½ × b × h</a:t>
+              <a:t>A = ½ × (b₁ + b₂) × h</a:t>
             </a:r>
             <a:endParaRPr lang="en-US" sz="950" dirty="0"/>
           </a:p>
@@ -5015,7 +5015,7 @@
                 <a:ea typeface="Courier New" pitchFamily="34" charset="-122"/>
                 <a:cs typeface="Courier New" pitchFamily="34" charset="-120"/>
               </a:rPr>
-              <a:t>A = ½ × 14 × 9</a:t>
+              <a:t>A = ½ × (10 + 6) × 7</a:t>
             </a:r>
             <a:endParaRPr lang="en-US" sz="950" dirty="0"/>
           </a:p>
@@ -5082,7 +5082,7 @@
                 <a:ea typeface="Courier New" pitchFamily="34" charset="-122"/>
                 <a:cs typeface="Courier New" pitchFamily="34" charset="-120"/>
               </a:rPr>
-              <a:t>A = ½ × 23 = 11.5 sq m</a:t>
+              <a:t>A = (10 + 6) × 7 = 112 sq m</a:t>
             </a:r>
             <a:endParaRPr lang="en-US" sz="950" dirty="0"/>
           </a:p>
@@ -5883,7 +5883,7 @@
                 <a:ea typeface="Hanken Grotesk" pitchFamily="34" charset="-122"/>
                 <a:cs typeface="Hanken Grotesk" pitchFamily="34" charset="-120"/>
               </a:rPr>
-              <a:t>Reveal Math Grade 6  ·  Unit 5  ·  Lesson 5-3</a:t>
+              <a:t>Reveal Math Grade 6  ·  Unit 5  ·  Lesson 5-2</a:t>
             </a:r>
             <a:endParaRPr lang="en-US" sz="750" dirty="0"/>
           </a:p>
@@ -6095,7 +6095,7 @@
                 <a:ea typeface="Hanken Grotesk" pitchFamily="34" charset="-122"/>
                 <a:cs typeface="Hanken Grotesk" pitchFamily="34" charset="-120"/>
               </a:rPr>
-              <a:t>My triangular garden has a base of 12 feet and a height of 8 feet.</a:t>
+              <a:t>My trapezoid window has a top base of 4 feet, a bottom base of 8 feet, and a height of 5 feet.</a:t>
             </a:r>
             <a:endParaRPr lang="en-US" sz="1050" dirty="0"/>
           </a:p>
@@ -6193,7 +6193,7 @@
                 <a:ea typeface="Hanken Grotesk" pitchFamily="34" charset="-122"/>
                 <a:cs typeface="Hanken Grotesk" pitchFamily="34" charset="-120"/>
               </a:rPr>
-              <a:t>I write the formula: A = ½ × base × height.</a:t>
+              <a:t>I write the formula: A = ½ × (b1 + b2) × h.</a:t>
             </a:r>
             <a:endParaRPr lang="en-US" sz="1050" dirty="0"/>
           </a:p>
@@ -6291,7 +6291,7 @@
                 <a:ea typeface="Hanken Grotesk" pitchFamily="34" charset="-122"/>
                 <a:cs typeface="Hanken Grotesk" pitchFamily="34" charset="-120"/>
               </a:rPr>
-              <a:t>I put in the numbers: A = ½ × 12 × 8.</a:t>
+              <a:t>I add the bases first: 4 + 8 = 12.</a:t>
             </a:r>
             <a:endParaRPr lang="en-US" sz="1050" dirty="0"/>
           </a:p>
@@ -6389,7 +6389,7 @@
                 <a:ea typeface="Hanken Grotesk" pitchFamily="34" charset="-122"/>
                 <a:cs typeface="Hanken Grotesk" pitchFamily="34" charset="-120"/>
               </a:rPr>
-              <a:t>I multiply base × height first: 12 × 8 = 96.</a:t>
+              <a:t>I multiply by the height: 12 × 5 = 60.</a:t>
             </a:r>
             <a:endParaRPr lang="en-US" sz="1050" dirty="0"/>
           </a:p>
@@ -6487,7 +6487,7 @@
                 <a:ea typeface="Hanken Grotesk" pitchFamily="34" charset="-122"/>
                 <a:cs typeface="Hanken Grotesk" pitchFamily="34" charset="-120"/>
               </a:rPr>
-              <a:t>I take half: ½ × 96 = 48. So the area is 48 square feet.</a:t>
+              <a:t>I take half: ½ × 60 = 30. So the area is 30 square feet.</a:t>
             </a:r>
             <a:endParaRPr lang="en-US" sz="1050" dirty="0"/>
           </a:p>
@@ -7177,7 +7177,7 @@
                 <a:ea typeface="Hanken Grotesk" pitchFamily="34" charset="-122"/>
                 <a:cs typeface="Hanken Grotesk" pitchFamily="34" charset="-120"/>
               </a:rPr>
-              <a:t>Reveal Math Grade 6  ·  Unit 5  ·  Lesson 5-3</a:t>
+              <a:t>Reveal Math Grade 6  ·  Unit 5  ·  Lesson 5-2</a:t>
             </a:r>
             <a:endParaRPr lang="en-US" sz="750" dirty="0"/>
           </a:p>
@@ -7403,7 +7403,7 @@
                 <a:ea typeface="Hanken Grotesk" pitchFamily="34" charset="-122"/>
                 <a:cs typeface="Hanken Grotesk" pitchFamily="34" charset="-120"/>
               </a:rPr>
-              <a:t>Sketch a model for today's problem. Label it using Base and Height.</a:t>
+              <a:t>Sketch a model for today's problem. Label it using Trapezoid and Base 1 (b1).</a:t>
             </a:r>
             <a:endParaRPr lang="en-US" sz="1000" dirty="0"/>
           </a:p>
@@ -7551,7 +7551,7 @@
                 <a:ea typeface="Hanken Grotesk" pitchFamily="34" charset="-122"/>
                 <a:cs typeface="Hanken Grotesk" pitchFamily="34" charset="-120"/>
               </a:rPr>
-              <a:t>In 2–3 sentences, explain "Area of a triangle = ½ × base × height. A triangle is exactly half of a rectangle with the same base and height." in your own words.</a:t>
+              <a:t>In 2–3 sentences, explain "Area of a trapezoid = ½ × (base 1 + base 2) × height. We add the two bases first, then take half." in your own words.</a:t>
             </a:r>
             <a:endParaRPr lang="en-US" sz="1000" dirty="0"/>
           </a:p>
@@ -7847,7 +7847,7 @@
                 <a:ea typeface="Hanken Grotesk" pitchFamily="34" charset="-122"/>
                 <a:cs typeface="Hanken Grotesk" pitchFamily="34" charset="-120"/>
               </a:rPr>
-              <a:t>Write your own problem that uses Base, then solve it and make an answer key.</a:t>
+              <a:t>Write your own problem that uses Trapezoid, then solve it and make an answer key.</a:t>
             </a:r>
             <a:endParaRPr lang="en-US" sz="1000" dirty="0"/>
           </a:p>
@@ -8239,7 +8239,7 @@
                 <a:ea typeface="Hanken Grotesk" pitchFamily="34" charset="-122"/>
                 <a:cs typeface="Hanken Grotesk" pitchFamily="34" charset="-120"/>
               </a:rPr>
-              <a:t>Reveal Math Grade 6  ·  Unit 5  ·  Lesson 5-3</a:t>
+              <a:t>Reveal Math Grade 6  ·  Unit 5  ·  Lesson 5-2</a:t>
             </a:r>
             <a:endParaRPr lang="en-US" sz="750" dirty="0"/>
           </a:p>
@@ -8408,7 +8408,7 @@
                 <a:ea typeface="Hanken Grotesk" pitchFamily="34" charset="-122"/>
                 <a:cs typeface="Hanken Grotesk" pitchFamily="34" charset="-120"/>
               </a:rPr>
-              <a:t>What is the area of a triangle with base 10 cm and height 6 cm?</a:t>
+              <a:t>What is the area of a trapezoid with bases 6 cm and 10 cm, and height 4 cm?</a:t>
             </a:r>
             <a:endParaRPr lang="en-US" sz="1050" dirty="0"/>
           </a:p>
@@ -8484,7 +8484,7 @@
                 <a:ea typeface="Hanken Grotesk" pitchFamily="34" charset="-122"/>
                 <a:cs typeface="Hanken Grotesk" pitchFamily="34" charset="-120"/>
               </a:rPr>
-              <a:t>A triangle has an area of 24 sq ft and a base of 8 ft. What is the height?</a:t>
+              <a:t>A trapezoid has an area of 45 sq ft, bases of 7 ft and 11 ft. What is the height?</a:t>
             </a:r>
             <a:endParaRPr lang="en-US" sz="1050" dirty="0"/>
           </a:p>
@@ -8560,7 +8560,7 @@
                 <a:ea typeface="Hanken Grotesk" pitchFamily="34" charset="-122"/>
                 <a:cs typeface="Hanken Grotesk" pitchFamily="34" charset="-120"/>
               </a:rPr>
-              <a:t>Why do we divide by 2 when finding the area of a triangle?</a:t>
+              <a:t>What is the first step when finding the area of a trapezoid?</a:t>
             </a:r>
             <a:endParaRPr lang="en-US" sz="1050" dirty="0"/>
           </a:p>
@@ -8697,7 +8697,7 @@
                 <a:ea typeface="Hanken Grotesk" pitchFamily="34" charset="-122"/>
                 <a:cs typeface="Hanken Grotesk" pitchFamily="34" charset="-120"/>
               </a:rPr>
-              <a:t>The homeowner paints a triangular A-frame wall with base 20 ft and height 14 ft; one can covers 50 sq ft. Talk through how many cans are needed.</a:t>
+              <a:t>The builder pours concrete for a trapezoidal driveway with edges of 20 ft and 12 ft and a height of 15 ft; one bag covers 6 sq ft. Walk through finding the number of bags.</a:t>
             </a:r>
             <a:endParaRPr lang="en-US" sz="1000" dirty="0"/>
           </a:p>
@@ -9204,7 +9204,7 @@
                 <a:ea typeface="Hanken Grotesk" pitchFamily="34" charset="-122"/>
                 <a:cs typeface="Hanken Grotesk" pitchFamily="34" charset="-120"/>
               </a:rPr>
-              <a:t>Reveal Math Grade 6  ·  Unit 5  ·  Lesson 5-3</a:t>
+              <a:t>Reveal Math Grade 6  ·  Unit 5  ·  Lesson 5-2</a:t>
             </a:r>
             <a:endParaRPr lang="en-US" sz="750" dirty="0"/>
           </a:p>
@@ -9408,7 +9408,7 @@
                 <a:ea typeface="Hanken Grotesk" pitchFamily="34" charset="-122"/>
                 <a:cs typeface="Hanken Grotesk" pitchFamily="34" charset="-120"/>
               </a:rPr>
-              <a:t>Today's key idea is "Area of a triangle = ½ × base × height. A triangle is exactly half of a rectangle with the same base and height." — and it works because ___.</a:t>
+              <a:t>Today's key idea is "Area of a trapezoid = ½ × (base 1 + base 2) × height. We add the two bases first, then take half." — and it works because ___.</a:t>
             </a:r>
             <a:endParaRPr lang="en-US" sz="1050" dirty="0"/>
           </a:p>
@@ -9557,7 +9557,7 @@
                 <a:ea typeface="Hanken Grotesk" pitchFamily="34" charset="-122"/>
                 <a:cs typeface="Hanken Grotesk" pitchFamily="34" charset="-120"/>
               </a:rPr>
-              <a:t>Because Base means ___, but a tricky part is ___, so I have to ___.</a:t>
+              <a:t>Because Trapezoid means ___, but a tricky part is ___, so I have to ___.</a:t>
             </a:r>
             <a:endParaRPr lang="en-US" sz="1050" dirty="0"/>
           </a:p>
@@ -9706,7 +9706,7 @@
                 <a:ea typeface="Hanken Grotesk" pitchFamily="34" charset="-122"/>
                 <a:cs typeface="Hanken Grotesk" pitchFamily="34" charset="-120"/>
               </a:rPr>
-              <a:t>A common mistake with Base is ___. It happens because ___, and the fix is ___.</a:t>
+              <a:t>A common mistake with Trapezoid is ___. It happens because ___, and the fix is ___.</a:t>
             </a:r>
             <a:endParaRPr lang="en-US" sz="1050" dirty="0"/>
           </a:p>
@@ -10121,7 +10121,7 @@
                 <a:ea typeface="Hanken Grotesk" pitchFamily="34" charset="-122"/>
                 <a:cs typeface="Hanken Grotesk" pitchFamily="34" charset="-120"/>
               </a:rPr>
-              <a:t>Reveal Math Grade 6  ·  Unit 5  ·  Lesson 5-3</a:t>
+              <a:t>Reveal Math Grade 6  ·  Unit 5  ·  Lesson 5-2</a:t>
             </a:r>
             <a:endParaRPr lang="en-US" sz="750" dirty="0"/>
           </a:p>
@@ -10579,7 +10579,7 @@
                 <a:ea typeface="Hanken Grotesk" pitchFamily="34" charset="-122"/>
                 <a:cs typeface="Hanken Grotesk" pitchFamily="34" charset="-120"/>
               </a:rPr>
-              <a:t>A triangle has a base of 11 inches and a height of 8 inches. What is its area?</a:t>
+              <a:t>A trapezoid has bases of 9 inches and 5 inches, and a height of 6 inches. What is its area?</a:t>
             </a:r>
             <a:endParaRPr lang="en-US" sz="1050" dirty="0"/>
           </a:p>
@@ -10618,7 +10618,7 @@
                 <a:ea typeface="Hanken Grotesk" pitchFamily="34" charset="-122"/>
                 <a:cs typeface="Hanken Grotesk" pitchFamily="34" charset="-120"/>
               </a:rPr>
-              <a:t>A.  44 sq in</a:t>
+              <a:t>A.  42 sq in</a:t>
             </a:r>
             <a:endParaRPr lang="en-US" sz="1000" dirty="0"/>
           </a:p>
@@ -10657,7 +10657,7 @@
                 <a:ea typeface="Hanken Grotesk" pitchFamily="34" charset="-122"/>
                 <a:cs typeface="Hanken Grotesk" pitchFamily="34" charset="-120"/>
               </a:rPr>
-              <a:t>B.  88 sq in</a:t>
+              <a:t>B.  84 sq in</a:t>
             </a:r>
             <a:endParaRPr lang="en-US" sz="1000" dirty="0"/>
           </a:p>
@@ -10696,7 +10696,7 @@
                 <a:ea typeface="Hanken Grotesk" pitchFamily="34" charset="-122"/>
                 <a:cs typeface="Hanken Grotesk" pitchFamily="34" charset="-120"/>
               </a:rPr>
-              <a:t>C.  19 sq in</a:t>
+              <a:t>C.  27 sq in</a:t>
             </a:r>
             <a:endParaRPr lang="en-US" sz="1000" dirty="0"/>
           </a:p>
@@ -10735,7 +10735,7 @@
                 <a:ea typeface="Hanken Grotesk" pitchFamily="34" charset="-122"/>
                 <a:cs typeface="Hanken Grotesk" pitchFamily="34" charset="-120"/>
               </a:rPr>
-              <a:t>D.  44 in</a:t>
+              <a:t>D.  42 in</a:t>
             </a:r>
             <a:endParaRPr lang="en-US" sz="1000" dirty="0"/>
           </a:p>
@@ -11249,7 +11249,7 @@
                 <a:ea typeface="Hanken Grotesk" pitchFamily="34" charset="-122"/>
                 <a:cs typeface="Hanken Grotesk" pitchFamily="34" charset="-120"/>
               </a:rPr>
-              <a:t>Reveal Math Grade 6  ·  Unit 5  ·  Lesson 5-3</a:t>
+              <a:t>Reveal Math Grade 6  ·  Unit 5  ·  Lesson 5-2</a:t>
             </a:r>
             <a:endParaRPr lang="en-US" sz="750" dirty="0"/>
           </a:p>
@@ -11363,7 +11363,7 @@
                 <a:ea typeface="Hanken Grotesk" pitchFamily="34" charset="-122"/>
                 <a:cs typeface="Hanken Grotesk" pitchFamily="34" charset="-120"/>
               </a:rPr>
-              <a:t>I can find the area of a triangle using the formula A = ½ × base × height.</a:t>
+              <a:t>I can find the area of a trapezoid using the formula A = ½(b1 + b2) × h.</a:t>
             </a:r>
             <a:endParaRPr lang="en-US" sz="1100" dirty="0"/>
           </a:p>
@@ -12682,7 +12682,7 @@
                 <a:ea typeface="Hanken Grotesk" pitchFamily="34" charset="-122"/>
                 <a:cs typeface="Hanken Grotesk" pitchFamily="34" charset="-120"/>
               </a:rPr>
-              <a:t>Reveal Math Grade 6  ·  Unit 5  ·  Lesson 5-3</a:t>
+              <a:t>Reveal Math Grade 6  ·  Unit 5  ·  Lesson 5-2</a:t>
             </a:r>
             <a:endParaRPr lang="en-US" sz="750" dirty="0"/>
           </a:p>
@@ -12932,7 +12932,7 @@
                 <a:ea typeface="Hanken Grotesk" pitchFamily="34" charset="-122"/>
                 <a:cs typeface="Hanken Grotesk" pitchFamily="34" charset="-120"/>
               </a:rPr>
-              <a:t>I can find the area of a triangle using the formula A = ½ × base × height.</a:t>
+              <a:t>I can find the area of a trapezoid using the formula A = ½(b1 + b2) × h.</a:t>
             </a:r>
             <a:endParaRPr lang="en-US" sz="1800" dirty="0"/>
           </a:p>
@@ -13104,7 +13104,7 @@
                 <a:ea typeface="Hanken Grotesk" pitchFamily="34" charset="-122"/>
                 <a:cs typeface="Hanken Grotesk" pitchFamily="34" charset="-120"/>
               </a:rPr>
-              <a:t>I can explain my steps using the words base, height, area, and perpendicular.</a:t>
+              <a:t>I can explain my steps using the words trapezoid, base, height, and area.</a:t>
             </a:r>
             <a:endParaRPr lang="en-US" sz="1700" dirty="0"/>
           </a:p>
@@ -13496,7 +13496,7 @@
                 <a:ea typeface="Hanken Grotesk" pitchFamily="34" charset="-122"/>
                 <a:cs typeface="Hanken Grotesk" pitchFamily="34" charset="-120"/>
               </a:rPr>
-              <a:t>Reveal Math Grade 6  ·  Unit 5  ·  Lesson 5-3</a:t>
+              <a:t>Reveal Math Grade 6  ·  Unit 5  ·  Lesson 5-2</a:t>
             </a:r>
             <a:endParaRPr lang="en-US" sz="750" dirty="0"/>
           </a:p>
@@ -13693,7 +13693,7 @@
                 <a:ea typeface="Hanken Grotesk" pitchFamily="34" charset="-122"/>
                 <a:cs typeface="Hanken Grotesk" pitchFamily="34" charset="-120"/>
               </a:rPr>
-              <a:t>The triangular garden bed has a base of 12 feet and a height of 8 feet. Which measurement is the height, and how is it different from the slanted side?</a:t>
+              <a:t>The trapezoidal window has a top edge of 4 feet and a bottom edge of 8 feet. Why does the area formula use BOTH bases instead of just one?</a:t>
             </a:r>
             <a:endParaRPr lang="en-US" sz="1400" dirty="0"/>
           </a:p>
@@ -14023,7 +14023,7 @@
                 <a:ea typeface="Hanken Grotesk" pitchFamily="34" charset="-122"/>
                 <a:cs typeface="Hanken Grotesk" pitchFamily="34" charset="-120"/>
               </a:rPr>
-              <a:t>base</a:t>
+              <a:t>trapezoid</a:t>
             </a:r>
             <a:endParaRPr lang="en-US" sz="900" dirty="0"/>
           </a:p>
@@ -14070,7 +14070,7 @@
                 <a:ea typeface="Hanken Grotesk" pitchFamily="34" charset="-122"/>
                 <a:cs typeface="Hanken Grotesk" pitchFamily="34" charset="-120"/>
               </a:rPr>
-              <a:t>height</a:t>
+              <a:t>base 1 (b1)</a:t>
             </a:r>
             <a:endParaRPr lang="en-US" sz="900" dirty="0"/>
           </a:p>
@@ -14117,7 +14117,7 @@
                 <a:ea typeface="Hanken Grotesk" pitchFamily="34" charset="-122"/>
                 <a:cs typeface="Hanken Grotesk" pitchFamily="34" charset="-120"/>
               </a:rPr>
-              <a:t>perpendicular</a:t>
+              <a:t>base 2 (b2)</a:t>
             </a:r>
             <a:endParaRPr lang="en-US" sz="900" dirty="0"/>
           </a:p>
@@ -14164,7 +14164,7 @@
                 <a:ea typeface="Hanken Grotesk" pitchFamily="34" charset="-122"/>
                 <a:cs typeface="Hanken Grotesk" pitchFamily="34" charset="-120"/>
               </a:rPr>
-              <a:t>area</a:t>
+              <a:t>height</a:t>
             </a:r>
             <a:endParaRPr lang="en-US" sz="900" dirty="0"/>
           </a:p>
@@ -14211,7 +14211,7 @@
                 <a:ea typeface="Hanken Grotesk" pitchFamily="34" charset="-122"/>
                 <a:cs typeface="Hanken Grotesk" pitchFamily="34" charset="-120"/>
               </a:rPr>
-              <a:t>formula</a:t>
+              <a:t>area</a:t>
             </a:r>
             <a:endParaRPr lang="en-US" sz="900" dirty="0"/>
           </a:p>
@@ -14603,7 +14603,7 @@
                 <a:ea typeface="Hanken Grotesk" pitchFamily="34" charset="-122"/>
                 <a:cs typeface="Hanken Grotesk" pitchFamily="34" charset="-120"/>
               </a:rPr>
-              <a:t>Reveal Math Grade 6  ·  Unit 5  ·  Lesson 5-3</a:t>
+              <a:t>Reveal Math Grade 6  ·  Unit 5  ·  Lesson 5-2</a:t>
             </a:r>
             <a:endParaRPr lang="en-US" sz="750" dirty="0"/>
           </a:p>
@@ -14800,7 +14800,7 @@
                 <a:ea typeface="Hanken Grotesk" pitchFamily="34" charset="-122"/>
                 <a:cs typeface="Hanken Grotesk" pitchFamily="34" charset="-120"/>
               </a:rPr>
-              <a:t>On the grid your triangle (base 12, height 8) fits inside a 12 by 8 rectangle. Why do we divide by 2 to find the triangle's area?</a:t>
+              <a:t>On the grid you copied the trapezoid (bases 8 and 4, height 5), flipped it, and joined it to the original. What shape formed, and how does that explain the 1/2 in the formula?</a:t>
             </a:r>
             <a:endParaRPr lang="en-US" sz="1400" dirty="0"/>
           </a:p>
@@ -15130,7 +15130,7 @@
                 <a:ea typeface="Hanken Grotesk" pitchFamily="34" charset="-122"/>
                 <a:cs typeface="Hanken Grotesk" pitchFamily="34" charset="-120"/>
               </a:rPr>
-              <a:t>base</a:t>
+              <a:t>trapezoid</a:t>
             </a:r>
             <a:endParaRPr lang="en-US" sz="900" dirty="0"/>
           </a:p>
@@ -15177,7 +15177,7 @@
                 <a:ea typeface="Hanken Grotesk" pitchFamily="34" charset="-122"/>
                 <a:cs typeface="Hanken Grotesk" pitchFamily="34" charset="-120"/>
               </a:rPr>
-              <a:t>height</a:t>
+              <a:t>parallelogram</a:t>
             </a:r>
             <a:endParaRPr lang="en-US" sz="900" dirty="0"/>
           </a:p>
@@ -15224,7 +15224,7 @@
                 <a:ea typeface="Hanken Grotesk" pitchFamily="34" charset="-122"/>
                 <a:cs typeface="Hanken Grotesk" pitchFamily="34" charset="-120"/>
               </a:rPr>
-              <a:t>area</a:t>
+              <a:t>base 1 (b1)</a:t>
             </a:r>
             <a:endParaRPr lang="en-US" sz="900" dirty="0"/>
           </a:p>
@@ -15271,7 +15271,7 @@
                 <a:ea typeface="Hanken Grotesk" pitchFamily="34" charset="-122"/>
                 <a:cs typeface="Hanken Grotesk" pitchFamily="34" charset="-120"/>
               </a:rPr>
-              <a:t>perpendicular</a:t>
+              <a:t>base 2 (b2)</a:t>
             </a:r>
             <a:endParaRPr lang="en-US" sz="900" dirty="0"/>
           </a:p>
@@ -15318,7 +15318,7 @@
                 <a:ea typeface="Hanken Grotesk" pitchFamily="34" charset="-122"/>
                 <a:cs typeface="Hanken Grotesk" pitchFamily="34" charset="-120"/>
               </a:rPr>
-              <a:t>formula</a:t>
+              <a:t>height</a:t>
             </a:r>
             <a:endParaRPr lang="en-US" sz="900" dirty="0"/>
           </a:p>
@@ -15710,7 +15710,7 @@
                 <a:ea typeface="Hanken Grotesk" pitchFamily="34" charset="-122"/>
                 <a:cs typeface="Hanken Grotesk" pitchFamily="34" charset="-120"/>
               </a:rPr>
-              <a:t>Reveal Math Grade 6  ·  Unit 5  ·  Lesson 5-3</a:t>
+              <a:t>Reveal Math Grade 6  ·  Unit 5  ·  Lesson 5-2</a:t>
             </a:r>
             <a:endParaRPr lang="en-US" sz="750" dirty="0"/>
           </a:p>
@@ -15907,7 +15907,7 @@
                 <a:ea typeface="Hanken Grotesk" pitchFamily="34" charset="-122"/>
                 <a:cs typeface="Hanken Grotesk" pitchFamily="34" charset="-120"/>
               </a:rPr>
-              <a:t>The homeowner paints a triangular A-frame wall with base 20 ft and height 14 ft; one can covers 50 sq ft. Talk through how many cans are needed.</a:t>
+              <a:t>The builder pours concrete for a trapezoidal driveway with edges of 20 ft and 12 ft and a height of 15 ft; one bag covers 6 sq ft. Walk through finding the number of bags.</a:t>
             </a:r>
             <a:endParaRPr lang="en-US" sz="1400" dirty="0"/>
           </a:p>
@@ -16237,7 +16237,7 @@
                 <a:ea typeface="Hanken Grotesk" pitchFamily="34" charset="-122"/>
                 <a:cs typeface="Hanken Grotesk" pitchFamily="34" charset="-120"/>
               </a:rPr>
-              <a:t>triangle</a:t>
+              <a:t>trapezoid</a:t>
             </a:r>
             <a:endParaRPr lang="en-US" sz="900" dirty="0"/>
           </a:p>
@@ -16284,7 +16284,7 @@
                 <a:ea typeface="Hanken Grotesk" pitchFamily="34" charset="-122"/>
                 <a:cs typeface="Hanken Grotesk" pitchFamily="34" charset="-120"/>
               </a:rPr>
-              <a:t>base</a:t>
+              <a:t>base 1 (b1)</a:t>
             </a:r>
             <a:endParaRPr lang="en-US" sz="900" dirty="0"/>
           </a:p>
@@ -16331,7 +16331,7 @@
                 <a:ea typeface="Hanken Grotesk" pitchFamily="34" charset="-122"/>
                 <a:cs typeface="Hanken Grotesk" pitchFamily="34" charset="-120"/>
               </a:rPr>
-              <a:t>height</a:t>
+              <a:t>base 2 (b2)</a:t>
             </a:r>
             <a:endParaRPr lang="en-US" sz="900" dirty="0"/>
           </a:p>
@@ -16378,7 +16378,7 @@
                 <a:ea typeface="Hanken Grotesk" pitchFamily="34" charset="-122"/>
                 <a:cs typeface="Hanken Grotesk" pitchFamily="34" charset="-120"/>
               </a:rPr>
-              <a:t>area</a:t>
+              <a:t>height</a:t>
             </a:r>
             <a:endParaRPr lang="en-US" sz="900" dirty="0"/>
           </a:p>
@@ -16425,7 +16425,7 @@
                 <a:ea typeface="Hanken Grotesk" pitchFamily="34" charset="-122"/>
                 <a:cs typeface="Hanken Grotesk" pitchFamily="34" charset="-120"/>
               </a:rPr>
-              <a:t>formula</a:t>
+              <a:t>area</a:t>
             </a:r>
             <a:endParaRPr lang="en-US" sz="900" dirty="0"/>
           </a:p>
@@ -16817,7 +16817,7 @@
                 <a:ea typeface="Hanken Grotesk" pitchFamily="34" charset="-122"/>
                 <a:cs typeface="Hanken Grotesk" pitchFamily="34" charset="-120"/>
               </a:rPr>
-              <a:t>Reveal Math Grade 6  ·  Unit 5  ·  Lesson 5-3</a:t>
+              <a:t>Reveal Math Grade 6  ·  Unit 5  ·  Lesson 5-2</a:t>
             </a:r>
             <a:endParaRPr lang="en-US" sz="750" dirty="0"/>
           </a:p>
@@ -17014,7 +17014,7 @@
                 <a:ea typeface="Hanken Grotesk" pitchFamily="34" charset="-122"/>
                 <a:cs typeface="Hanken Grotesk" pitchFamily="34" charset="-120"/>
               </a:rPr>
-              <a:t>During practice on Area of Triangles, what strategy did you use when a problem felt tricky?</a:t>
+              <a:t>During practice on Area of Trapezoids, what strategy did you use when a problem felt tricky?</a:t>
             </a:r>
             <a:endParaRPr lang="en-US" sz="1400" dirty="0"/>
           </a:p>
@@ -17344,7 +17344,7 @@
                 <a:ea typeface="Hanken Grotesk" pitchFamily="34" charset="-122"/>
                 <a:cs typeface="Hanken Grotesk" pitchFamily="34" charset="-120"/>
               </a:rPr>
-              <a:t>Base</a:t>
+              <a:t>Trapezoid</a:t>
             </a:r>
             <a:endParaRPr lang="en-US" sz="900" dirty="0"/>
           </a:p>
@@ -17391,7 +17391,7 @@
                 <a:ea typeface="Hanken Grotesk" pitchFamily="34" charset="-122"/>
                 <a:cs typeface="Hanken Grotesk" pitchFamily="34" charset="-120"/>
               </a:rPr>
-              <a:t>Height</a:t>
+              <a:t>Base 1 (b1)</a:t>
             </a:r>
             <a:endParaRPr lang="en-US" sz="900" dirty="0"/>
           </a:p>
@@ -17438,7 +17438,7 @@
                 <a:ea typeface="Hanken Grotesk" pitchFamily="34" charset="-122"/>
                 <a:cs typeface="Hanken Grotesk" pitchFamily="34" charset="-120"/>
               </a:rPr>
-              <a:t>Area</a:t>
+              <a:t>Base 2 (b2)</a:t>
             </a:r>
             <a:endParaRPr lang="en-US" sz="900" dirty="0"/>
           </a:p>
@@ -17485,7 +17485,7 @@
                 <a:ea typeface="Hanken Grotesk" pitchFamily="34" charset="-122"/>
                 <a:cs typeface="Hanken Grotesk" pitchFamily="34" charset="-120"/>
               </a:rPr>
-              <a:t>Perpendicular</a:t>
+              <a:t>Height</a:t>
             </a:r>
             <a:endParaRPr lang="en-US" sz="900" dirty="0"/>
           </a:p>
@@ -17877,7 +17877,7 @@
                 <a:ea typeface="Hanken Grotesk" pitchFamily="34" charset="-122"/>
                 <a:cs typeface="Hanken Grotesk" pitchFamily="34" charset="-120"/>
               </a:rPr>
-              <a:t>Reveal Math Grade 6  ·  Unit 5  ·  Lesson 5-3</a:t>
+              <a:t>Reveal Math Grade 6  ·  Unit 5  ·  Lesson 5-2</a:t>
             </a:r>
             <a:endParaRPr lang="en-US" sz="750" dirty="0"/>
           </a:p>
@@ -18071,7 +18071,7 @@
                 <a:ea typeface="Hanken Grotesk" pitchFamily="34" charset="-122"/>
                 <a:cs typeface="Hanken Grotesk" pitchFamily="34" charset="-120"/>
               </a:rPr>
-              <a:t>Your architecture firm is designing a park with triangular garden beds. The client wants to know exactly how much soil to order, which means calculating the area of each triangular section. The first garden has a base of 12 feet and a height of 8 feet.</a:t>
+              <a:t>Your architecture firm is designing a trapezoidal window for a modern building. The glass supplier charges by the square foot, so the team must calculate the exact area. The window has a top edge of 4 feet, a bottom edge of 8 feet, and a height of 5 feet.</a:t>
             </a:r>
             <a:endParaRPr lang="en-US" sz="1150" dirty="0"/>
           </a:p>
@@ -18296,7 +18296,7 @@
                 <a:ea typeface="Hanken Grotesk" pitchFamily="34" charset="-122"/>
                 <a:cs typeface="Hanken Grotesk" pitchFamily="34" charset="-120"/>
               </a:rPr>
-              <a:t>•  What shape are the garden beds?</a:t>
+              <a:t>•  What shape is the window?</a:t>
             </a:r>
             <a:endParaRPr lang="en-US" sz="1000" dirty="0"/>
           </a:p>
@@ -18316,7 +18316,7 @@
                 <a:ea typeface="Hanken Grotesk" pitchFamily="34" charset="-122"/>
                 <a:cs typeface="Hanken Grotesk" pitchFamily="34" charset="-120"/>
               </a:rPr>
-              <a:t>•  What measurements do we need to find the area?</a:t>
+              <a:t>•  How many parallel sides does it have?</a:t>
             </a:r>
             <a:endParaRPr lang="en-US" sz="1000" dirty="0"/>
           </a:p>
@@ -18336,7 +18336,7 @@
                 <a:ea typeface="Hanken Grotesk" pitchFamily="34" charset="-122"/>
                 <a:cs typeface="Hanken Grotesk" pitchFamily="34" charset="-120"/>
               </a:rPr>
-              <a:t>•  How is the area of a triangle related to the area of a rectangle?</a:t>
+              <a:t>•  What measurements are given?</a:t>
             </a:r>
             <a:endParaRPr lang="en-US" sz="1000" dirty="0"/>
           </a:p>
@@ -18453,7 +18453,7 @@
                 <a:ea typeface="Hanken Grotesk" pitchFamily="34" charset="-122"/>
                 <a:cs typeface="Hanken Grotesk" pitchFamily="34" charset="-120"/>
               </a:rPr>
-              <a:t>•  Why do we divide by 2 when finding the area of a triangle?</a:t>
+              <a:t>•  Why does the formula use two bases instead of one?</a:t>
             </a:r>
             <a:endParaRPr lang="en-US" sz="1000" dirty="0"/>
           </a:p>
@@ -18473,7 +18473,7 @@
                 <a:ea typeface="Hanken Grotesk" pitchFamily="34" charset="-122"/>
                 <a:cs typeface="Hanken Grotesk" pitchFamily="34" charset="-120"/>
               </a:rPr>
-              <a:t>•  Does it matter which side we call the base?</a:t>
+              <a:t>•  What would happen if both bases were the same length?</a:t>
             </a:r>
             <a:endParaRPr lang="en-US" sz="1000" dirty="0"/>
           </a:p>
@@ -18865,7 +18865,7 @@
                 <a:ea typeface="Hanken Grotesk" pitchFamily="34" charset="-122"/>
                 <a:cs typeface="Hanken Grotesk" pitchFamily="34" charset="-120"/>
               </a:rPr>
-              <a:t>Reveal Math Grade 6  ·  Unit 5  ·  Lesson 5-3</a:t>
+              <a:t>Reveal Math Grade 6  ·  Unit 5  ·  Lesson 5-2</a:t>
             </a:r>
             <a:endParaRPr lang="en-US" sz="750" dirty="0"/>
           </a:p>
@@ -19161,7 +19161,7 @@
                           <a:ea typeface="Hanken Grotesk" pitchFamily="34" charset="-122"/>
                           <a:cs typeface="Hanken Grotesk" pitchFamily="34" charset="-120"/>
                         </a:rPr>
-                        <a:t>Base</a:t>
+                        <a:t>Trapezoid</a:t>
                       </a:r>
                       <a:pPr indent="0" marL="0">
                         <a:buNone/>
@@ -19185,7 +19185,7 @@
                           <a:ea typeface="Hanken Grotesk" pitchFamily="34" charset="-122"/>
                           <a:cs typeface="Hanken Grotesk" pitchFamily="34" charset="-120"/>
                         </a:rPr>
-                        <a:t>Base</a:t>
+                        <a:t>Trapecio</a:t>
                       </a:r>
                       <a:endParaRPr lang="en-US" sz="950" dirty="0">
                         <a:latin typeface="Hanken Grotesk" charset="0"/>
@@ -19253,7 +19253,7 @@
                           <a:ea typeface="Hanken Grotesk" pitchFamily="34" charset="-122"/>
                           <a:cs typeface="Hanken Grotesk" pitchFamily="34" charset="-120"/>
                         </a:rPr>
-                        <a:t>A side of the triangle you use to find the area.</a:t>
+                        <a:t>A four-sided shape with just one pair of parallel sides.</a:t>
                       </a:r>
                       <a:pPr indent="0" marL="0">
                         <a:buNone/>
@@ -19277,7 +19277,7 @@
                           <a:ea typeface="Hanken Grotesk" pitchFamily="34" charset="-122"/>
                           <a:cs typeface="Hanken Grotesk" pitchFamily="34" charset="-120"/>
                         </a:rPr>
-                        <a:t>Un lado del triángulo que usas para hallar el área.</a:t>
+                        <a:t>Una figura de cuatro lados con solo un par de lados paralelos.</a:t>
                       </a:r>
                       <a:endParaRPr lang="en-US" sz="900" dirty="0">
                         <a:latin typeface="Hanken Grotesk" charset="0"/>
@@ -19345,7 +19345,515 @@
                           <a:ea typeface="Hanken Grotesk" pitchFamily="34" charset="-122"/>
                           <a:cs typeface="Hanken Grotesk" pitchFamily="34" charset="-120"/>
                         </a:rPr>
-                        <a:t>If the bottom of a triangle is 10 cm, then b = 10 cm in the formula A = ½ × b × h</a:t>
+                        <a:t>A table top wider than the bottom shelf — the top and bottom edges are parallel, the two sides slant inward</a:t>
+                      </a:r>
+                      <a:endParaRPr lang="en-US" sz="900" dirty="0">
+                        <a:latin typeface="Hanken Grotesk" charset="0"/>
+                        <a:ea typeface="Hanken Grotesk" charset="0"/>
+                        <a:cs typeface="Hanken Grotesk" charset="0"/>
+                      </a:endParaRPr>
+                    </a:p>
+                  </a:txBody>
+                  <a:tcPr marL="91440" marR="91440" marT="45720" marB="45720" anchor="ctr">
+                    <a:lnL w="9525" cap="flat" cmpd="sng" algn="ctr">
+                      <a:solidFill>
+                        <a:srgbClr val="D6DBDF"/>
+                      </a:solidFill>
+                      <a:prstDash val="solid"/>
+                      <a:round/>
+                      <a:headEnd type="none" w="med" len="med"/>
+                      <a:tailEnd type="none" w="med" len="med"/>
+                    </a:lnL>
+                    <a:lnR w="9525" cap="flat" cmpd="sng" algn="ctr">
+                      <a:solidFill>
+                        <a:srgbClr val="D6DBDF"/>
+                      </a:solidFill>
+                      <a:prstDash val="solid"/>
+                      <a:round/>
+                      <a:headEnd type="none" w="med" len="med"/>
+                      <a:tailEnd type="none" w="med" len="med"/>
+                    </a:lnR>
+                    <a:lnT w="9525" cap="flat" cmpd="sng" algn="ctr">
+                      <a:solidFill>
+                        <a:srgbClr val="D6DBDF"/>
+                      </a:solidFill>
+                      <a:prstDash val="solid"/>
+                      <a:round/>
+                      <a:headEnd type="none" w="med" len="med"/>
+                      <a:tailEnd type="none" w="med" len="med"/>
+                    </a:lnT>
+                    <a:lnB w="9525" cap="flat" cmpd="sng" algn="ctr">
+                      <a:solidFill>
+                        <a:srgbClr val="D6DBDF"/>
+                      </a:solidFill>
+                      <a:prstDash val="solid"/>
+                      <a:round/>
+                      <a:headEnd type="none" w="med" len="med"/>
+                      <a:tailEnd type="none" w="med" len="med"/>
+                    </a:lnB>
+                    <a:solidFill>
+                      <a:srgbClr val="FFFFFF"/>
+                    </a:solidFill>
+                  </a:tcPr>
+                </a:tc>
+              </a:tr>
+              <a:tr h="457200">
+                <a:tc>
+                  <a:txBody>
+                    <a:bodyPr/>
+                    <a:lstStyle/>
+                    <a:p>
+                      <a:pPr indent="0" marL="0">
+                        <a:buNone/>
+                      </a:pPr>
+                      <a:r>
+                        <a:rPr lang="en-US" sz="950" b="1" dirty="0">
+                          <a:solidFill>
+                            <a:srgbClr val="17324D"/>
+                          </a:solidFill>
+                          <a:latin typeface="Hanken Grotesk" pitchFamily="34" charset="0"/>
+                          <a:ea typeface="Hanken Grotesk" pitchFamily="34" charset="-122"/>
+                          <a:cs typeface="Hanken Grotesk" pitchFamily="34" charset="-120"/>
+                        </a:rPr>
+                        <a:t>Base 1 (b1)</a:t>
+                      </a:r>
+                      <a:pPr indent="0" marL="0">
+                        <a:buNone/>
+                      </a:pPr>
+                      <a:endParaRPr lang="en-US" sz="950" dirty="0">
+                        <a:latin typeface="Hanken Grotesk" charset="0"/>
+                        <a:ea typeface="Hanken Grotesk" charset="0"/>
+                        <a:cs typeface="Hanken Grotesk" charset="0"/>
+                      </a:endParaRPr>
+                    </a:p>
+                    <a:p>
+                      <a:pPr indent="0" marL="0">
+                        <a:buNone/>
+                      </a:pPr>
+                      <a:r>
+                        <a:rPr lang="en-US" sz="850" i="1" dirty="0">
+                          <a:solidFill>
+                            <a:srgbClr val="8A96A3"/>
+                          </a:solidFill>
+                          <a:latin typeface="Hanken Grotesk" pitchFamily="34" charset="0"/>
+                          <a:ea typeface="Hanken Grotesk" pitchFamily="34" charset="-122"/>
+                          <a:cs typeface="Hanken Grotesk" pitchFamily="34" charset="-120"/>
+                        </a:rPr>
+                        <a:t>Base 1 (b1)</a:t>
+                      </a:r>
+                      <a:endParaRPr lang="en-US" sz="950" dirty="0">
+                        <a:latin typeface="Hanken Grotesk" charset="0"/>
+                        <a:ea typeface="Hanken Grotesk" charset="0"/>
+                        <a:cs typeface="Hanken Grotesk" charset="0"/>
+                      </a:endParaRPr>
+                    </a:p>
+                  </a:txBody>
+                  <a:tcPr marL="91440" marR="91440" marT="45720" marB="45720" anchor="ctr">
+                    <a:lnL w="9525" cap="flat" cmpd="sng" algn="ctr">
+                      <a:solidFill>
+                        <a:srgbClr val="D6DBDF"/>
+                      </a:solidFill>
+                      <a:prstDash val="solid"/>
+                      <a:round/>
+                      <a:headEnd type="none" w="med" len="med"/>
+                      <a:tailEnd type="none" w="med" len="med"/>
+                    </a:lnL>
+                    <a:lnR w="9525" cap="flat" cmpd="sng" algn="ctr">
+                      <a:solidFill>
+                        <a:srgbClr val="D6DBDF"/>
+                      </a:solidFill>
+                      <a:prstDash val="solid"/>
+                      <a:round/>
+                      <a:headEnd type="none" w="med" len="med"/>
+                      <a:tailEnd type="none" w="med" len="med"/>
+                    </a:lnR>
+                    <a:lnT w="9525" cap="flat" cmpd="sng" algn="ctr">
+                      <a:solidFill>
+                        <a:srgbClr val="D6DBDF"/>
+                      </a:solidFill>
+                      <a:prstDash val="solid"/>
+                      <a:round/>
+                      <a:headEnd type="none" w="med" len="med"/>
+                      <a:tailEnd type="none" w="med" len="med"/>
+                    </a:lnT>
+                    <a:lnB w="9525" cap="flat" cmpd="sng" algn="ctr">
+                      <a:solidFill>
+                        <a:srgbClr val="D6DBDF"/>
+                      </a:solidFill>
+                      <a:prstDash val="solid"/>
+                      <a:round/>
+                      <a:headEnd type="none" w="med" len="med"/>
+                      <a:tailEnd type="none" w="med" len="med"/>
+                    </a:lnB>
+                    <a:solidFill>
+                      <a:srgbClr val="F4F1E8"/>
+                    </a:solidFill>
+                  </a:tcPr>
+                </a:tc>
+                <a:tc>
+                  <a:txBody>
+                    <a:bodyPr/>
+                    <a:lstStyle/>
+                    <a:p>
+                      <a:pPr indent="0" marL="0">
+                        <a:buNone/>
+                      </a:pPr>
+                      <a:r>
+                        <a:rPr lang="en-US" sz="900" dirty="0">
+                          <a:solidFill>
+                            <a:srgbClr val="24323F"/>
+                          </a:solidFill>
+                          <a:latin typeface="Hanken Grotesk" pitchFamily="34" charset="0"/>
+                          <a:ea typeface="Hanken Grotesk" pitchFamily="34" charset="-122"/>
+                          <a:cs typeface="Hanken Grotesk" pitchFamily="34" charset="-120"/>
+                        </a:rPr>
+                        <a:t>One of the two parallel sides of a trapezoid.</a:t>
+                      </a:r>
+                      <a:pPr indent="0" marL="0">
+                        <a:buNone/>
+                      </a:pPr>
+                      <a:endParaRPr lang="en-US" sz="900" dirty="0">
+                        <a:latin typeface="Hanken Grotesk" charset="0"/>
+                        <a:ea typeface="Hanken Grotesk" charset="0"/>
+                        <a:cs typeface="Hanken Grotesk" charset="0"/>
+                      </a:endParaRPr>
+                    </a:p>
+                    <a:p>
+                      <a:pPr indent="0" marL="0">
+                        <a:buNone/>
+                      </a:pPr>
+                      <a:r>
+                        <a:rPr lang="en-US" sz="850" i="1" dirty="0">
+                          <a:solidFill>
+                            <a:srgbClr val="8A96A3"/>
+                          </a:solidFill>
+                          <a:latin typeface="Hanken Grotesk" pitchFamily="34" charset="0"/>
+                          <a:ea typeface="Hanken Grotesk" pitchFamily="34" charset="-122"/>
+                          <a:cs typeface="Hanken Grotesk" pitchFamily="34" charset="-120"/>
+                        </a:rPr>
+                        <a:t>Uno de los dos lados paralelos de un trapecio.</a:t>
+                      </a:r>
+                      <a:endParaRPr lang="en-US" sz="900" dirty="0">
+                        <a:latin typeface="Hanken Grotesk" charset="0"/>
+                        <a:ea typeface="Hanken Grotesk" charset="0"/>
+                        <a:cs typeface="Hanken Grotesk" charset="0"/>
+                      </a:endParaRPr>
+                    </a:p>
+                  </a:txBody>
+                  <a:tcPr marL="91440" marR="91440" marT="45720" marB="45720" anchor="ctr">
+                    <a:lnL w="9525" cap="flat" cmpd="sng" algn="ctr">
+                      <a:solidFill>
+                        <a:srgbClr val="D6DBDF"/>
+                      </a:solidFill>
+                      <a:prstDash val="solid"/>
+                      <a:round/>
+                      <a:headEnd type="none" w="med" len="med"/>
+                      <a:tailEnd type="none" w="med" len="med"/>
+                    </a:lnL>
+                    <a:lnR w="9525" cap="flat" cmpd="sng" algn="ctr">
+                      <a:solidFill>
+                        <a:srgbClr val="D6DBDF"/>
+                      </a:solidFill>
+                      <a:prstDash val="solid"/>
+                      <a:round/>
+                      <a:headEnd type="none" w="med" len="med"/>
+                      <a:tailEnd type="none" w="med" len="med"/>
+                    </a:lnR>
+                    <a:lnT w="9525" cap="flat" cmpd="sng" algn="ctr">
+                      <a:solidFill>
+                        <a:srgbClr val="D6DBDF"/>
+                      </a:solidFill>
+                      <a:prstDash val="solid"/>
+                      <a:round/>
+                      <a:headEnd type="none" w="med" len="med"/>
+                      <a:tailEnd type="none" w="med" len="med"/>
+                    </a:lnT>
+                    <a:lnB w="9525" cap="flat" cmpd="sng" algn="ctr">
+                      <a:solidFill>
+                        <a:srgbClr val="D6DBDF"/>
+                      </a:solidFill>
+                      <a:prstDash val="solid"/>
+                      <a:round/>
+                      <a:headEnd type="none" w="med" len="med"/>
+                      <a:tailEnd type="none" w="med" len="med"/>
+                    </a:lnB>
+                    <a:solidFill>
+                      <a:srgbClr val="F4F1E8"/>
+                    </a:solidFill>
+                  </a:tcPr>
+                </a:tc>
+                <a:tc>
+                  <a:txBody>
+                    <a:bodyPr/>
+                    <a:lstStyle/>
+                    <a:p>
+                      <a:pPr indent="0" marL="0">
+                        <a:buNone/>
+                      </a:pPr>
+                      <a:r>
+                        <a:rPr lang="en-US" sz="900" i="1" dirty="0">
+                          <a:solidFill>
+                            <a:srgbClr val="24323F"/>
+                          </a:solidFill>
+                          <a:latin typeface="Hanken Grotesk" pitchFamily="34" charset="0"/>
+                          <a:ea typeface="Hanken Grotesk" pitchFamily="34" charset="-122"/>
+                          <a:cs typeface="Hanken Grotesk" pitchFamily="34" charset="-120"/>
+                        </a:rPr>
+                        <a:t>If the bottom of the trapezoid is 10 ft, then b₁ = 10 ft in the formula A = ½(b₁ + b₂) × h</a:t>
+                      </a:r>
+                      <a:endParaRPr lang="en-US" sz="900" dirty="0">
+                        <a:latin typeface="Hanken Grotesk" charset="0"/>
+                        <a:ea typeface="Hanken Grotesk" charset="0"/>
+                        <a:cs typeface="Hanken Grotesk" charset="0"/>
+                      </a:endParaRPr>
+                    </a:p>
+                  </a:txBody>
+                  <a:tcPr marL="91440" marR="91440" marT="45720" marB="45720" anchor="ctr">
+                    <a:lnL w="9525" cap="flat" cmpd="sng" algn="ctr">
+                      <a:solidFill>
+                        <a:srgbClr val="D6DBDF"/>
+                      </a:solidFill>
+                      <a:prstDash val="solid"/>
+                      <a:round/>
+                      <a:headEnd type="none" w="med" len="med"/>
+                      <a:tailEnd type="none" w="med" len="med"/>
+                    </a:lnL>
+                    <a:lnR w="9525" cap="flat" cmpd="sng" algn="ctr">
+                      <a:solidFill>
+                        <a:srgbClr val="D6DBDF"/>
+                      </a:solidFill>
+                      <a:prstDash val="solid"/>
+                      <a:round/>
+                      <a:headEnd type="none" w="med" len="med"/>
+                      <a:tailEnd type="none" w="med" len="med"/>
+                    </a:lnR>
+                    <a:lnT w="9525" cap="flat" cmpd="sng" algn="ctr">
+                      <a:solidFill>
+                        <a:srgbClr val="D6DBDF"/>
+                      </a:solidFill>
+                      <a:prstDash val="solid"/>
+                      <a:round/>
+                      <a:headEnd type="none" w="med" len="med"/>
+                      <a:tailEnd type="none" w="med" len="med"/>
+                    </a:lnT>
+                    <a:lnB w="9525" cap="flat" cmpd="sng" algn="ctr">
+                      <a:solidFill>
+                        <a:srgbClr val="D6DBDF"/>
+                      </a:solidFill>
+                      <a:prstDash val="solid"/>
+                      <a:round/>
+                      <a:headEnd type="none" w="med" len="med"/>
+                      <a:tailEnd type="none" w="med" len="med"/>
+                    </a:lnB>
+                    <a:solidFill>
+                      <a:srgbClr val="F4F1E8"/>
+                    </a:solidFill>
+                  </a:tcPr>
+                </a:tc>
+              </a:tr>
+              <a:tr h="457200">
+                <a:tc>
+                  <a:txBody>
+                    <a:bodyPr/>
+                    <a:lstStyle/>
+                    <a:p>
+                      <a:pPr indent="0" marL="0">
+                        <a:buNone/>
+                      </a:pPr>
+                      <a:r>
+                        <a:rPr lang="en-US" sz="950" b="1" dirty="0">
+                          <a:solidFill>
+                            <a:srgbClr val="17324D"/>
+                          </a:solidFill>
+                          <a:latin typeface="Hanken Grotesk" pitchFamily="34" charset="0"/>
+                          <a:ea typeface="Hanken Grotesk" pitchFamily="34" charset="-122"/>
+                          <a:cs typeface="Hanken Grotesk" pitchFamily="34" charset="-120"/>
+                        </a:rPr>
+                        <a:t>Base 2 (b2)</a:t>
+                      </a:r>
+                      <a:pPr indent="0" marL="0">
+                        <a:buNone/>
+                      </a:pPr>
+                      <a:endParaRPr lang="en-US" sz="950" dirty="0">
+                        <a:latin typeface="Hanken Grotesk" charset="0"/>
+                        <a:ea typeface="Hanken Grotesk" charset="0"/>
+                        <a:cs typeface="Hanken Grotesk" charset="0"/>
+                      </a:endParaRPr>
+                    </a:p>
+                    <a:p>
+                      <a:pPr indent="0" marL="0">
+                        <a:buNone/>
+                      </a:pPr>
+                      <a:r>
+                        <a:rPr lang="en-US" sz="850" i="1" dirty="0">
+                          <a:solidFill>
+                            <a:srgbClr val="8A96A3"/>
+                          </a:solidFill>
+                          <a:latin typeface="Hanken Grotesk" pitchFamily="34" charset="0"/>
+                          <a:ea typeface="Hanken Grotesk" pitchFamily="34" charset="-122"/>
+                          <a:cs typeface="Hanken Grotesk" pitchFamily="34" charset="-120"/>
+                        </a:rPr>
+                        <a:t>Base 2 (b2)</a:t>
+                      </a:r>
+                      <a:endParaRPr lang="en-US" sz="950" dirty="0">
+                        <a:latin typeface="Hanken Grotesk" charset="0"/>
+                        <a:ea typeface="Hanken Grotesk" charset="0"/>
+                        <a:cs typeface="Hanken Grotesk" charset="0"/>
+                      </a:endParaRPr>
+                    </a:p>
+                  </a:txBody>
+                  <a:tcPr marL="91440" marR="91440" marT="45720" marB="45720" anchor="ctr">
+                    <a:lnL w="9525" cap="flat" cmpd="sng" algn="ctr">
+                      <a:solidFill>
+                        <a:srgbClr val="D6DBDF"/>
+                      </a:solidFill>
+                      <a:prstDash val="solid"/>
+                      <a:round/>
+                      <a:headEnd type="none" w="med" len="med"/>
+                      <a:tailEnd type="none" w="med" len="med"/>
+                    </a:lnL>
+                    <a:lnR w="9525" cap="flat" cmpd="sng" algn="ctr">
+                      <a:solidFill>
+                        <a:srgbClr val="D6DBDF"/>
+                      </a:solidFill>
+                      <a:prstDash val="solid"/>
+                      <a:round/>
+                      <a:headEnd type="none" w="med" len="med"/>
+                      <a:tailEnd type="none" w="med" len="med"/>
+                    </a:lnR>
+                    <a:lnT w="9525" cap="flat" cmpd="sng" algn="ctr">
+                      <a:solidFill>
+                        <a:srgbClr val="D6DBDF"/>
+                      </a:solidFill>
+                      <a:prstDash val="solid"/>
+                      <a:round/>
+                      <a:headEnd type="none" w="med" len="med"/>
+                      <a:tailEnd type="none" w="med" len="med"/>
+                    </a:lnT>
+                    <a:lnB w="9525" cap="flat" cmpd="sng" algn="ctr">
+                      <a:solidFill>
+                        <a:srgbClr val="D6DBDF"/>
+                      </a:solidFill>
+                      <a:prstDash val="solid"/>
+                      <a:round/>
+                      <a:headEnd type="none" w="med" len="med"/>
+                      <a:tailEnd type="none" w="med" len="med"/>
+                    </a:lnB>
+                    <a:solidFill>
+                      <a:srgbClr val="FFFFFF"/>
+                    </a:solidFill>
+                  </a:tcPr>
+                </a:tc>
+                <a:tc>
+                  <a:txBody>
+                    <a:bodyPr/>
+                    <a:lstStyle/>
+                    <a:p>
+                      <a:pPr indent="0" marL="0">
+                        <a:buNone/>
+                      </a:pPr>
+                      <a:r>
+                        <a:rPr lang="en-US" sz="900" dirty="0">
+                          <a:solidFill>
+                            <a:srgbClr val="24323F"/>
+                          </a:solidFill>
+                          <a:latin typeface="Hanken Grotesk" pitchFamily="34" charset="0"/>
+                          <a:ea typeface="Hanken Grotesk" pitchFamily="34" charset="-122"/>
+                          <a:cs typeface="Hanken Grotesk" pitchFamily="34" charset="-120"/>
+                        </a:rPr>
+                        <a:t>The other parallel side of a trapezoid.</a:t>
+                      </a:r>
+                      <a:pPr indent="0" marL="0">
+                        <a:buNone/>
+                      </a:pPr>
+                      <a:endParaRPr lang="en-US" sz="900" dirty="0">
+                        <a:latin typeface="Hanken Grotesk" charset="0"/>
+                        <a:ea typeface="Hanken Grotesk" charset="0"/>
+                        <a:cs typeface="Hanken Grotesk" charset="0"/>
+                      </a:endParaRPr>
+                    </a:p>
+                    <a:p>
+                      <a:pPr indent="0" marL="0">
+                        <a:buNone/>
+                      </a:pPr>
+                      <a:r>
+                        <a:rPr lang="en-US" sz="850" i="1" dirty="0">
+                          <a:solidFill>
+                            <a:srgbClr val="8A96A3"/>
+                          </a:solidFill>
+                          <a:latin typeface="Hanken Grotesk" pitchFamily="34" charset="0"/>
+                          <a:ea typeface="Hanken Grotesk" pitchFamily="34" charset="-122"/>
+                          <a:cs typeface="Hanken Grotesk" pitchFamily="34" charset="-120"/>
+                        </a:rPr>
+                        <a:t>El otro lado paralelo de un trapecio.</a:t>
+                      </a:r>
+                      <a:endParaRPr lang="en-US" sz="900" dirty="0">
+                        <a:latin typeface="Hanken Grotesk" charset="0"/>
+                        <a:ea typeface="Hanken Grotesk" charset="0"/>
+                        <a:cs typeface="Hanken Grotesk" charset="0"/>
+                      </a:endParaRPr>
+                    </a:p>
+                  </a:txBody>
+                  <a:tcPr marL="91440" marR="91440" marT="45720" marB="45720" anchor="ctr">
+                    <a:lnL w="9525" cap="flat" cmpd="sng" algn="ctr">
+                      <a:solidFill>
+                        <a:srgbClr val="D6DBDF"/>
+                      </a:solidFill>
+                      <a:prstDash val="solid"/>
+                      <a:round/>
+                      <a:headEnd type="none" w="med" len="med"/>
+                      <a:tailEnd type="none" w="med" len="med"/>
+                    </a:lnL>
+                    <a:lnR w="9525" cap="flat" cmpd="sng" algn="ctr">
+                      <a:solidFill>
+                        <a:srgbClr val="D6DBDF"/>
+                      </a:solidFill>
+                      <a:prstDash val="solid"/>
+                      <a:round/>
+                      <a:headEnd type="none" w="med" len="med"/>
+                      <a:tailEnd type="none" w="med" len="med"/>
+                    </a:lnR>
+                    <a:lnT w="9525" cap="flat" cmpd="sng" algn="ctr">
+                      <a:solidFill>
+                        <a:srgbClr val="D6DBDF"/>
+                      </a:solidFill>
+                      <a:prstDash val="solid"/>
+                      <a:round/>
+                      <a:headEnd type="none" w="med" len="med"/>
+                      <a:tailEnd type="none" w="med" len="med"/>
+                    </a:lnT>
+                    <a:lnB w="9525" cap="flat" cmpd="sng" algn="ctr">
+                      <a:solidFill>
+                        <a:srgbClr val="D6DBDF"/>
+                      </a:solidFill>
+                      <a:prstDash val="solid"/>
+                      <a:round/>
+                      <a:headEnd type="none" w="med" len="med"/>
+                      <a:tailEnd type="none" w="med" len="med"/>
+                    </a:lnB>
+                    <a:solidFill>
+                      <a:srgbClr val="FFFFFF"/>
+                    </a:solidFill>
+                  </a:tcPr>
+                </a:tc>
+                <a:tc>
+                  <a:txBody>
+                    <a:bodyPr/>
+                    <a:lstStyle/>
+                    <a:p>
+                      <a:pPr indent="0" marL="0">
+                        <a:buNone/>
+                      </a:pPr>
+                      <a:r>
+                        <a:rPr lang="en-US" sz="900" i="1" dirty="0">
+                          <a:solidFill>
+                            <a:srgbClr val="24323F"/>
+                          </a:solidFill>
+                          <a:latin typeface="Hanken Grotesk" pitchFamily="34" charset="0"/>
+                          <a:ea typeface="Hanken Grotesk" pitchFamily="34" charset="-122"/>
+                          <a:cs typeface="Hanken Grotesk" pitchFamily="34" charset="-120"/>
+                        </a:rPr>
+                        <a:t>If the top of the trapezoid is 6 ft, then b₂ = 6 ft; both bases are parallel to each other</a:t>
                       </a:r>
                       <a:endParaRPr lang="en-US" sz="900" dirty="0">
                         <a:latin typeface="Hanken Grotesk" charset="0"/>
@@ -19507,7 +20015,7 @@
                           <a:ea typeface="Hanken Grotesk" pitchFamily="34" charset="-122"/>
                           <a:cs typeface="Hanken Grotesk" pitchFamily="34" charset="-120"/>
                         </a:rPr>
-                        <a:t>The straight-up distance from the base to the top corner.</a:t>
+                        <a:t>The straight-up distance between the two parallel sides.</a:t>
                       </a:r>
                       <a:pPr indent="0" marL="0">
                         <a:buNone/>
@@ -19531,7 +20039,7 @@
                           <a:ea typeface="Hanken Grotesk" pitchFamily="34" charset="-122"/>
                           <a:cs typeface="Hanken Grotesk" pitchFamily="34" charset="-120"/>
                         </a:rPr>
-                        <a:t>La distancia recta desde la base hasta la esquina de arriba.</a:t>
+                        <a:t>La distancia recta entre los dos lados paralelos.</a:t>
                       </a:r>
                       <a:endParaRPr lang="en-US" sz="900" dirty="0">
                         <a:latin typeface="Hanken Grotesk" charset="0"/>
@@ -19599,7 +20107,7 @@
                           <a:ea typeface="Hanken Grotesk" pitchFamily="34" charset="-122"/>
                           <a:cs typeface="Hanken Grotesk" pitchFamily="34" charset="-120"/>
                         </a:rPr>
-                        <a:t>A dashed vertical line from the top point straight down to the base at a 90° angle — like dropping a plumb line</a:t>
+                        <a:t>A dashed vertical line from the top base straight down to the bottom base at a 90° angle — NOT the slanted side</a:t>
                       </a:r>
                       <a:endParaRPr lang="en-US" sz="900" dirty="0">
                         <a:latin typeface="Hanken Grotesk" charset="0"/>
@@ -19853,515 +20361,7 @@
                           <a:ea typeface="Hanken Grotesk" pitchFamily="34" charset="-122"/>
                           <a:cs typeface="Hanken Grotesk" pitchFamily="34" charset="-120"/>
                         </a:rPr>
-                        <a:t>A triangle with b = 8 and h = 6 has area = ½ × 8 × 6 = 24 sq units — exactly half the rectangle around it</a:t>
-                      </a:r>
-                      <a:endParaRPr lang="en-US" sz="900" dirty="0">
-                        <a:latin typeface="Hanken Grotesk" charset="0"/>
-                        <a:ea typeface="Hanken Grotesk" charset="0"/>
-                        <a:cs typeface="Hanken Grotesk" charset="0"/>
-                      </a:endParaRPr>
-                    </a:p>
-                  </a:txBody>
-                  <a:tcPr marL="91440" marR="91440" marT="45720" marB="45720" anchor="ctr">
-                    <a:lnL w="9525" cap="flat" cmpd="sng" algn="ctr">
-                      <a:solidFill>
-                        <a:srgbClr val="D6DBDF"/>
-                      </a:solidFill>
-                      <a:prstDash val="solid"/>
-                      <a:round/>
-                      <a:headEnd type="none" w="med" len="med"/>
-                      <a:tailEnd type="none" w="med" len="med"/>
-                    </a:lnL>
-                    <a:lnR w="9525" cap="flat" cmpd="sng" algn="ctr">
-                      <a:solidFill>
-                        <a:srgbClr val="D6DBDF"/>
-                      </a:solidFill>
-                      <a:prstDash val="solid"/>
-                      <a:round/>
-                      <a:headEnd type="none" w="med" len="med"/>
-                      <a:tailEnd type="none" w="med" len="med"/>
-                    </a:lnR>
-                    <a:lnT w="9525" cap="flat" cmpd="sng" algn="ctr">
-                      <a:solidFill>
-                        <a:srgbClr val="D6DBDF"/>
-                      </a:solidFill>
-                      <a:prstDash val="solid"/>
-                      <a:round/>
-                      <a:headEnd type="none" w="med" len="med"/>
-                      <a:tailEnd type="none" w="med" len="med"/>
-                    </a:lnT>
-                    <a:lnB w="9525" cap="flat" cmpd="sng" algn="ctr">
-                      <a:solidFill>
-                        <a:srgbClr val="D6DBDF"/>
-                      </a:solidFill>
-                      <a:prstDash val="solid"/>
-                      <a:round/>
-                      <a:headEnd type="none" w="med" len="med"/>
-                      <a:tailEnd type="none" w="med" len="med"/>
-                    </a:lnB>
-                    <a:solidFill>
-                      <a:srgbClr val="FFFFFF"/>
-                    </a:solidFill>
-                  </a:tcPr>
-                </a:tc>
-              </a:tr>
-              <a:tr h="457200">
-                <a:tc>
-                  <a:txBody>
-                    <a:bodyPr/>
-                    <a:lstStyle/>
-                    <a:p>
-                      <a:pPr indent="0" marL="0">
-                        <a:buNone/>
-                      </a:pPr>
-                      <a:r>
-                        <a:rPr lang="en-US" sz="950" b="1" dirty="0">
-                          <a:solidFill>
-                            <a:srgbClr val="17324D"/>
-                          </a:solidFill>
-                          <a:latin typeface="Hanken Grotesk" pitchFamily="34" charset="0"/>
-                          <a:ea typeface="Hanken Grotesk" pitchFamily="34" charset="-122"/>
-                          <a:cs typeface="Hanken Grotesk" pitchFamily="34" charset="-120"/>
-                        </a:rPr>
-                        <a:t>Perpendicular</a:t>
-                      </a:r>
-                      <a:pPr indent="0" marL="0">
-                        <a:buNone/>
-                      </a:pPr>
-                      <a:endParaRPr lang="en-US" sz="950" dirty="0">
-                        <a:latin typeface="Hanken Grotesk" charset="0"/>
-                        <a:ea typeface="Hanken Grotesk" charset="0"/>
-                        <a:cs typeface="Hanken Grotesk" charset="0"/>
-                      </a:endParaRPr>
-                    </a:p>
-                    <a:p>
-                      <a:pPr indent="0" marL="0">
-                        <a:buNone/>
-                      </a:pPr>
-                      <a:r>
-                        <a:rPr lang="en-US" sz="850" i="1" dirty="0">
-                          <a:solidFill>
-                            <a:srgbClr val="8A96A3"/>
-                          </a:solidFill>
-                          <a:latin typeface="Hanken Grotesk" pitchFamily="34" charset="0"/>
-                          <a:ea typeface="Hanken Grotesk" pitchFamily="34" charset="-122"/>
-                          <a:cs typeface="Hanken Grotesk" pitchFamily="34" charset="-120"/>
-                        </a:rPr>
-                        <a:t>Perpendicular</a:t>
-                      </a:r>
-                      <a:endParaRPr lang="en-US" sz="950" dirty="0">
-                        <a:latin typeface="Hanken Grotesk" charset="0"/>
-                        <a:ea typeface="Hanken Grotesk" charset="0"/>
-                        <a:cs typeface="Hanken Grotesk" charset="0"/>
-                      </a:endParaRPr>
-                    </a:p>
-                  </a:txBody>
-                  <a:tcPr marL="91440" marR="91440" marT="45720" marB="45720" anchor="ctr">
-                    <a:lnL w="9525" cap="flat" cmpd="sng" algn="ctr">
-                      <a:solidFill>
-                        <a:srgbClr val="D6DBDF"/>
-                      </a:solidFill>
-                      <a:prstDash val="solid"/>
-                      <a:round/>
-                      <a:headEnd type="none" w="med" len="med"/>
-                      <a:tailEnd type="none" w="med" len="med"/>
-                    </a:lnL>
-                    <a:lnR w="9525" cap="flat" cmpd="sng" algn="ctr">
-                      <a:solidFill>
-                        <a:srgbClr val="D6DBDF"/>
-                      </a:solidFill>
-                      <a:prstDash val="solid"/>
-                      <a:round/>
-                      <a:headEnd type="none" w="med" len="med"/>
-                      <a:tailEnd type="none" w="med" len="med"/>
-                    </a:lnR>
-                    <a:lnT w="9525" cap="flat" cmpd="sng" algn="ctr">
-                      <a:solidFill>
-                        <a:srgbClr val="D6DBDF"/>
-                      </a:solidFill>
-                      <a:prstDash val="solid"/>
-                      <a:round/>
-                      <a:headEnd type="none" w="med" len="med"/>
-                      <a:tailEnd type="none" w="med" len="med"/>
-                    </a:lnT>
-                    <a:lnB w="9525" cap="flat" cmpd="sng" algn="ctr">
-                      <a:solidFill>
-                        <a:srgbClr val="D6DBDF"/>
-                      </a:solidFill>
-                      <a:prstDash val="solid"/>
-                      <a:round/>
-                      <a:headEnd type="none" w="med" len="med"/>
-                      <a:tailEnd type="none" w="med" len="med"/>
-                    </a:lnB>
-                    <a:solidFill>
-                      <a:srgbClr val="F4F1E8"/>
-                    </a:solidFill>
-                  </a:tcPr>
-                </a:tc>
-                <a:tc>
-                  <a:txBody>
-                    <a:bodyPr/>
-                    <a:lstStyle/>
-                    <a:p>
-                      <a:pPr indent="0" marL="0">
-                        <a:buNone/>
-                      </a:pPr>
-                      <a:r>
-                        <a:rPr lang="en-US" sz="900" dirty="0">
-                          <a:solidFill>
-                            <a:srgbClr val="24323F"/>
-                          </a:solidFill>
-                          <a:latin typeface="Hanken Grotesk" pitchFamily="34" charset="0"/>
-                          <a:ea typeface="Hanken Grotesk" pitchFamily="34" charset="-122"/>
-                          <a:cs typeface="Hanken Grotesk" pitchFamily="34" charset="-120"/>
-                        </a:rPr>
-                        <a:t>Two lines that meet to make a square corner (90 degrees).</a:t>
-                      </a:r>
-                      <a:pPr indent="0" marL="0">
-                        <a:buNone/>
-                      </a:pPr>
-                      <a:endParaRPr lang="en-US" sz="900" dirty="0">
-                        <a:latin typeface="Hanken Grotesk" charset="0"/>
-                        <a:ea typeface="Hanken Grotesk" charset="0"/>
-                        <a:cs typeface="Hanken Grotesk" charset="0"/>
-                      </a:endParaRPr>
-                    </a:p>
-                    <a:p>
-                      <a:pPr indent="0" marL="0">
-                        <a:buNone/>
-                      </a:pPr>
-                      <a:r>
-                        <a:rPr lang="en-US" sz="850" i="1" dirty="0">
-                          <a:solidFill>
-                            <a:srgbClr val="8A96A3"/>
-                          </a:solidFill>
-                          <a:latin typeface="Hanken Grotesk" pitchFamily="34" charset="0"/>
-                          <a:ea typeface="Hanken Grotesk" pitchFamily="34" charset="-122"/>
-                          <a:cs typeface="Hanken Grotesk" pitchFamily="34" charset="-120"/>
-                        </a:rPr>
-                        <a:t>Dos líneas que se unen formando una esquina recta (90 grados).</a:t>
-                      </a:r>
-                      <a:endParaRPr lang="en-US" sz="900" dirty="0">
-                        <a:latin typeface="Hanken Grotesk" charset="0"/>
-                        <a:ea typeface="Hanken Grotesk" charset="0"/>
-                        <a:cs typeface="Hanken Grotesk" charset="0"/>
-                      </a:endParaRPr>
-                    </a:p>
-                  </a:txBody>
-                  <a:tcPr marL="91440" marR="91440" marT="45720" marB="45720" anchor="ctr">
-                    <a:lnL w="9525" cap="flat" cmpd="sng" algn="ctr">
-                      <a:solidFill>
-                        <a:srgbClr val="D6DBDF"/>
-                      </a:solidFill>
-                      <a:prstDash val="solid"/>
-                      <a:round/>
-                      <a:headEnd type="none" w="med" len="med"/>
-                      <a:tailEnd type="none" w="med" len="med"/>
-                    </a:lnL>
-                    <a:lnR w="9525" cap="flat" cmpd="sng" algn="ctr">
-                      <a:solidFill>
-                        <a:srgbClr val="D6DBDF"/>
-                      </a:solidFill>
-                      <a:prstDash val="solid"/>
-                      <a:round/>
-                      <a:headEnd type="none" w="med" len="med"/>
-                      <a:tailEnd type="none" w="med" len="med"/>
-                    </a:lnR>
-                    <a:lnT w="9525" cap="flat" cmpd="sng" algn="ctr">
-                      <a:solidFill>
-                        <a:srgbClr val="D6DBDF"/>
-                      </a:solidFill>
-                      <a:prstDash val="solid"/>
-                      <a:round/>
-                      <a:headEnd type="none" w="med" len="med"/>
-                      <a:tailEnd type="none" w="med" len="med"/>
-                    </a:lnT>
-                    <a:lnB w="9525" cap="flat" cmpd="sng" algn="ctr">
-                      <a:solidFill>
-                        <a:srgbClr val="D6DBDF"/>
-                      </a:solidFill>
-                      <a:prstDash val="solid"/>
-                      <a:round/>
-                      <a:headEnd type="none" w="med" len="med"/>
-                      <a:tailEnd type="none" w="med" len="med"/>
-                    </a:lnB>
-                    <a:solidFill>
-                      <a:srgbClr val="F4F1E8"/>
-                    </a:solidFill>
-                  </a:tcPr>
-                </a:tc>
-                <a:tc>
-                  <a:txBody>
-                    <a:bodyPr/>
-                    <a:lstStyle/>
-                    <a:p>
-                      <a:pPr indent="0" marL="0">
-                        <a:buNone/>
-                      </a:pPr>
-                      <a:r>
-                        <a:rPr lang="en-US" sz="900" i="1" dirty="0">
-                          <a:solidFill>
-                            <a:srgbClr val="24323F"/>
-                          </a:solidFill>
-                          <a:latin typeface="Hanken Grotesk" pitchFamily="34" charset="0"/>
-                          <a:ea typeface="Hanken Grotesk" pitchFamily="34" charset="-122"/>
-                          <a:cs typeface="Hanken Grotesk" pitchFamily="34" charset="-120"/>
-                        </a:rPr>
-                        <a:t>The corner of a book or a door frame — the edges meet at exactly 90°, shown by a small square symbol</a:t>
-                      </a:r>
-                      <a:endParaRPr lang="en-US" sz="900" dirty="0">
-                        <a:latin typeface="Hanken Grotesk" charset="0"/>
-                        <a:ea typeface="Hanken Grotesk" charset="0"/>
-                        <a:cs typeface="Hanken Grotesk" charset="0"/>
-                      </a:endParaRPr>
-                    </a:p>
-                  </a:txBody>
-                  <a:tcPr marL="91440" marR="91440" marT="45720" marB="45720" anchor="ctr">
-                    <a:lnL w="9525" cap="flat" cmpd="sng" algn="ctr">
-                      <a:solidFill>
-                        <a:srgbClr val="D6DBDF"/>
-                      </a:solidFill>
-                      <a:prstDash val="solid"/>
-                      <a:round/>
-                      <a:headEnd type="none" w="med" len="med"/>
-                      <a:tailEnd type="none" w="med" len="med"/>
-                    </a:lnL>
-                    <a:lnR w="9525" cap="flat" cmpd="sng" algn="ctr">
-                      <a:solidFill>
-                        <a:srgbClr val="D6DBDF"/>
-                      </a:solidFill>
-                      <a:prstDash val="solid"/>
-                      <a:round/>
-                      <a:headEnd type="none" w="med" len="med"/>
-                      <a:tailEnd type="none" w="med" len="med"/>
-                    </a:lnR>
-                    <a:lnT w="9525" cap="flat" cmpd="sng" algn="ctr">
-                      <a:solidFill>
-                        <a:srgbClr val="D6DBDF"/>
-                      </a:solidFill>
-                      <a:prstDash val="solid"/>
-                      <a:round/>
-                      <a:headEnd type="none" w="med" len="med"/>
-                      <a:tailEnd type="none" w="med" len="med"/>
-                    </a:lnT>
-                    <a:lnB w="9525" cap="flat" cmpd="sng" algn="ctr">
-                      <a:solidFill>
-                        <a:srgbClr val="D6DBDF"/>
-                      </a:solidFill>
-                      <a:prstDash val="solid"/>
-                      <a:round/>
-                      <a:headEnd type="none" w="med" len="med"/>
-                      <a:tailEnd type="none" w="med" len="med"/>
-                    </a:lnB>
-                    <a:solidFill>
-                      <a:srgbClr val="F4F1E8"/>
-                    </a:solidFill>
-                  </a:tcPr>
-                </a:tc>
-              </a:tr>
-              <a:tr h="457200">
-                <a:tc>
-                  <a:txBody>
-                    <a:bodyPr/>
-                    <a:lstStyle/>
-                    <a:p>
-                      <a:pPr indent="0" marL="0">
-                        <a:buNone/>
-                      </a:pPr>
-                      <a:r>
-                        <a:rPr lang="en-US" sz="950" b="1" dirty="0">
-                          <a:solidFill>
-                            <a:srgbClr val="17324D"/>
-                          </a:solidFill>
-                          <a:latin typeface="Hanken Grotesk" pitchFamily="34" charset="0"/>
-                          <a:ea typeface="Hanken Grotesk" pitchFamily="34" charset="-122"/>
-                          <a:cs typeface="Hanken Grotesk" pitchFamily="34" charset="-120"/>
-                        </a:rPr>
-                        <a:t>Composite figure</a:t>
-                      </a:r>
-                      <a:pPr indent="0" marL="0">
-                        <a:buNone/>
-                      </a:pPr>
-                      <a:endParaRPr lang="en-US" sz="950" dirty="0">
-                        <a:latin typeface="Hanken Grotesk" charset="0"/>
-                        <a:ea typeface="Hanken Grotesk" charset="0"/>
-                        <a:cs typeface="Hanken Grotesk" charset="0"/>
-                      </a:endParaRPr>
-                    </a:p>
-                    <a:p>
-                      <a:pPr indent="0" marL="0">
-                        <a:buNone/>
-                      </a:pPr>
-                      <a:r>
-                        <a:rPr lang="en-US" sz="850" i="1" dirty="0">
-                          <a:solidFill>
-                            <a:srgbClr val="8A96A3"/>
-                          </a:solidFill>
-                          <a:latin typeface="Hanken Grotesk" pitchFamily="34" charset="0"/>
-                          <a:ea typeface="Hanken Grotesk" pitchFamily="34" charset="-122"/>
-                          <a:cs typeface="Hanken Grotesk" pitchFamily="34" charset="-120"/>
-                        </a:rPr>
-                        <a:t>Figura compuesta</a:t>
-                      </a:r>
-                      <a:endParaRPr lang="en-US" sz="950" dirty="0">
-                        <a:latin typeface="Hanken Grotesk" charset="0"/>
-                        <a:ea typeface="Hanken Grotesk" charset="0"/>
-                        <a:cs typeface="Hanken Grotesk" charset="0"/>
-                      </a:endParaRPr>
-                    </a:p>
-                  </a:txBody>
-                  <a:tcPr marL="91440" marR="91440" marT="45720" marB="45720" anchor="ctr">
-                    <a:lnL w="9525" cap="flat" cmpd="sng" algn="ctr">
-                      <a:solidFill>
-                        <a:srgbClr val="D6DBDF"/>
-                      </a:solidFill>
-                      <a:prstDash val="solid"/>
-                      <a:round/>
-                      <a:headEnd type="none" w="med" len="med"/>
-                      <a:tailEnd type="none" w="med" len="med"/>
-                    </a:lnL>
-                    <a:lnR w="9525" cap="flat" cmpd="sng" algn="ctr">
-                      <a:solidFill>
-                        <a:srgbClr val="D6DBDF"/>
-                      </a:solidFill>
-                      <a:prstDash val="solid"/>
-                      <a:round/>
-                      <a:headEnd type="none" w="med" len="med"/>
-                      <a:tailEnd type="none" w="med" len="med"/>
-                    </a:lnR>
-                    <a:lnT w="9525" cap="flat" cmpd="sng" algn="ctr">
-                      <a:solidFill>
-                        <a:srgbClr val="D6DBDF"/>
-                      </a:solidFill>
-                      <a:prstDash val="solid"/>
-                      <a:round/>
-                      <a:headEnd type="none" w="med" len="med"/>
-                      <a:tailEnd type="none" w="med" len="med"/>
-                    </a:lnT>
-                    <a:lnB w="9525" cap="flat" cmpd="sng" algn="ctr">
-                      <a:solidFill>
-                        <a:srgbClr val="D6DBDF"/>
-                      </a:solidFill>
-                      <a:prstDash val="solid"/>
-                      <a:round/>
-                      <a:headEnd type="none" w="med" len="med"/>
-                      <a:tailEnd type="none" w="med" len="med"/>
-                    </a:lnB>
-                    <a:solidFill>
-                      <a:srgbClr val="FFFFFF"/>
-                    </a:solidFill>
-                  </a:tcPr>
-                </a:tc>
-                <a:tc>
-                  <a:txBody>
-                    <a:bodyPr/>
-                    <a:lstStyle/>
-                    <a:p>
-                      <a:pPr indent="0" marL="0">
-                        <a:buNone/>
-                      </a:pPr>
-                      <a:r>
-                        <a:rPr lang="en-US" sz="900" dirty="0">
-                          <a:solidFill>
-                            <a:srgbClr val="24323F"/>
-                          </a:solidFill>
-                          <a:latin typeface="Hanken Grotesk" pitchFamily="34" charset="0"/>
-                          <a:ea typeface="Hanken Grotesk" pitchFamily="34" charset="-122"/>
-                          <a:cs typeface="Hanken Grotesk" pitchFamily="34" charset="-120"/>
-                        </a:rPr>
-                        <a:t>A shape made by putting two or more simple shapes together.</a:t>
-                      </a:r>
-                      <a:pPr indent="0" marL="0">
-                        <a:buNone/>
-                      </a:pPr>
-                      <a:endParaRPr lang="en-US" sz="900" dirty="0">
-                        <a:latin typeface="Hanken Grotesk" charset="0"/>
-                        <a:ea typeface="Hanken Grotesk" charset="0"/>
-                        <a:cs typeface="Hanken Grotesk" charset="0"/>
-                      </a:endParaRPr>
-                    </a:p>
-                    <a:p>
-                      <a:pPr indent="0" marL="0">
-                        <a:buNone/>
-                      </a:pPr>
-                      <a:r>
-                        <a:rPr lang="en-US" sz="850" i="1" dirty="0">
-                          <a:solidFill>
-                            <a:srgbClr val="8A96A3"/>
-                          </a:solidFill>
-                          <a:latin typeface="Hanken Grotesk" pitchFamily="34" charset="0"/>
-                          <a:ea typeface="Hanken Grotesk" pitchFamily="34" charset="-122"/>
-                          <a:cs typeface="Hanken Grotesk" pitchFamily="34" charset="-120"/>
-                        </a:rPr>
-                        <a:t>Una figura formada al juntar dos o más figuras simples.</a:t>
-                      </a:r>
-                      <a:endParaRPr lang="en-US" sz="900" dirty="0">
-                        <a:latin typeface="Hanken Grotesk" charset="0"/>
-                        <a:ea typeface="Hanken Grotesk" charset="0"/>
-                        <a:cs typeface="Hanken Grotesk" charset="0"/>
-                      </a:endParaRPr>
-                    </a:p>
-                  </a:txBody>
-                  <a:tcPr marL="91440" marR="91440" marT="45720" marB="45720" anchor="ctr">
-                    <a:lnL w="9525" cap="flat" cmpd="sng" algn="ctr">
-                      <a:solidFill>
-                        <a:srgbClr val="D6DBDF"/>
-                      </a:solidFill>
-                      <a:prstDash val="solid"/>
-                      <a:round/>
-                      <a:headEnd type="none" w="med" len="med"/>
-                      <a:tailEnd type="none" w="med" len="med"/>
-                    </a:lnL>
-                    <a:lnR w="9525" cap="flat" cmpd="sng" algn="ctr">
-                      <a:solidFill>
-                        <a:srgbClr val="D6DBDF"/>
-                      </a:solidFill>
-                      <a:prstDash val="solid"/>
-                      <a:round/>
-                      <a:headEnd type="none" w="med" len="med"/>
-                      <a:tailEnd type="none" w="med" len="med"/>
-                    </a:lnR>
-                    <a:lnT w="9525" cap="flat" cmpd="sng" algn="ctr">
-                      <a:solidFill>
-                        <a:srgbClr val="D6DBDF"/>
-                      </a:solidFill>
-                      <a:prstDash val="solid"/>
-                      <a:round/>
-                      <a:headEnd type="none" w="med" len="med"/>
-                      <a:tailEnd type="none" w="med" len="med"/>
-                    </a:lnT>
-                    <a:lnB w="9525" cap="flat" cmpd="sng" algn="ctr">
-                      <a:solidFill>
-                        <a:srgbClr val="D6DBDF"/>
-                      </a:solidFill>
-                      <a:prstDash val="solid"/>
-                      <a:round/>
-                      <a:headEnd type="none" w="med" len="med"/>
-                      <a:tailEnd type="none" w="med" len="med"/>
-                    </a:lnB>
-                    <a:solidFill>
-                      <a:srgbClr val="FFFFFF"/>
-                    </a:solidFill>
-                  </a:tcPr>
-                </a:tc>
-                <a:tc>
-                  <a:txBody>
-                    <a:bodyPr/>
-                    <a:lstStyle/>
-                    <a:p>
-                      <a:pPr indent="0" marL="0">
-                        <a:buNone/>
-                      </a:pPr>
-                      <a:r>
-                        <a:rPr lang="en-US" sz="900" i="1" dirty="0">
-                          <a:solidFill>
-                            <a:srgbClr val="24323F"/>
-                          </a:solidFill>
-                          <a:latin typeface="Hanken Grotesk" pitchFamily="34" charset="0"/>
-                          <a:ea typeface="Hanken Grotesk" pitchFamily="34" charset="-122"/>
-                          <a:cs typeface="Hanken Grotesk" pitchFamily="34" charset="-120"/>
-                        </a:rPr>
-                        <a:t>A house shape = a rectangle (the walls) + a triangle (the roof); total area = rectangle area + triangle area</a:t>
+                        <a:t>A trapezoid with b₁ = 10, b₂ = 6, h = 4 has area = ½(10 + 6) × 4 = 32 sq units</a:t>
                       </a:r>
                       <a:endParaRPr lang="en-US" sz="900" dirty="0">
                         <a:latin typeface="Hanken Grotesk" charset="0"/>
@@ -20450,7 +20450,7 @@
                 <a:ea typeface="Outfit" pitchFamily="34" charset="-122"/>
                 <a:cs typeface="Outfit" pitchFamily="34" charset="-120"/>
               </a:rPr>
-              <a:t>Perpendicular — example vs. non-example:</a:t>
+              <a:t>Trapezoid — example vs. non-example:</a:t>
             </a:r>
             <a:endParaRPr lang="en-US" sz="950" dirty="0"/>
           </a:p>
@@ -20537,7 +20537,7 @@
                 <a:ea typeface="Hanken Grotesk" pitchFamily="34" charset="-122"/>
                 <a:cs typeface="Hanken Grotesk" pitchFamily="34" charset="-120"/>
               </a:rPr>
-              <a:t>Two lines meeting at a 90° angle  </a:t>
+              <a:t>A four-sided shape with one pair of parallel sides  </a:t>
             </a:r>
             <a:pPr indent="0" marL="0">
               <a:buNone/>
@@ -20551,7 +20551,7 @@
                 <a:ea typeface="Hanken Grotesk" pitchFamily="34" charset="-122"/>
                 <a:cs typeface="Hanken Grotesk" pitchFamily="34" charset="-120"/>
               </a:rPr>
-              <a:t>Perpendicular lines form a right angle.</a:t>
+              <a:t>It has exactly one pair of parallel sides.</a:t>
             </a:r>
             <a:endParaRPr lang="en-US" sz="900" dirty="0"/>
           </a:p>
@@ -20638,7 +20638,7 @@
                 <a:ea typeface="Hanken Grotesk" pitchFamily="34" charset="-122"/>
                 <a:cs typeface="Hanken Grotesk" pitchFamily="34" charset="-120"/>
               </a:rPr>
-              <a:t>Two lines that never meet  </a:t>
+              <a:t>A rectangle  </a:t>
             </a:r>
             <a:pPr indent="0" marL="0">
               <a:buNone/>
@@ -20652,7 +20652,7 @@
                 <a:ea typeface="Hanken Grotesk" pitchFamily="34" charset="-122"/>
                 <a:cs typeface="Hanken Grotesk" pitchFamily="34" charset="-120"/>
               </a:rPr>
-              <a:t>Those are parallel lines, not perpendicular.</a:t>
+              <a:t>A rectangle has two pairs of parallel sides.</a:t>
             </a:r>
             <a:endParaRPr lang="en-US" sz="900" dirty="0"/>
           </a:p>
@@ -21044,7 +21044,7 @@
                 <a:ea typeface="Hanken Grotesk" pitchFamily="34" charset="-122"/>
                 <a:cs typeface="Hanken Grotesk" pitchFamily="34" charset="-120"/>
               </a:rPr>
-              <a:t>Reveal Math Grade 6  ·  Unit 5  ·  Lesson 5-3</a:t>
+              <a:t>Reveal Math Grade 6  ·  Unit 5  ·  Lesson 5-2</a:t>
             </a:r>
             <a:endParaRPr lang="en-US" sz="750" dirty="0"/>
           </a:p>
@@ -21199,7 +21199,7 @@
                 <a:ea typeface="Outfit" pitchFamily="34" charset="-122"/>
                 <a:cs typeface="Outfit" pitchFamily="34" charset="-120"/>
               </a:rPr>
-              <a:t>How do we find the area of a triangle?</a:t>
+              <a:t>How do we find the area of a trapezoid?</a:t>
             </a:r>
             <a:endParaRPr lang="en-US" sz="1200" dirty="0"/>
           </a:p>
@@ -21297,7 +21297,7 @@
                 <a:ea typeface="Hanken Grotesk" pitchFamily="34" charset="-122"/>
                 <a:cs typeface="Hanken Grotesk" pitchFamily="34" charset="-120"/>
               </a:rPr>
-              <a:t>Now a smaller triangle: base = 10 cm, height = 6 cm.</a:t>
+              <a:t>Now a smaller trapezoid: bases 3 cm and 5 cm, height 2 cm.</a:t>
             </a:r>
             <a:endParaRPr lang="en-US" sz="1050" dirty="0"/>
           </a:p>
@@ -21395,7 +21395,7 @@
                 <a:ea typeface="Hanken Grotesk" pitchFamily="34" charset="-122"/>
                 <a:cs typeface="Hanken Grotesk" pitchFamily="34" charset="-120"/>
               </a:rPr>
-              <a:t>First, what is 10 × 6? Yes, 60.</a:t>
+              <a:t>First, what is 3 + 5? Yes, 8.</a:t>
             </a:r>
             <a:endParaRPr lang="en-US" sz="1050" dirty="0"/>
           </a:p>
@@ -21493,7 +21493,7 @@
                 <a:ea typeface="Hanken Grotesk" pitchFamily="34" charset="-122"/>
                 <a:cs typeface="Hanken Grotesk" pitchFamily="34" charset="-120"/>
               </a:rPr>
-              <a:t>Now take half: what is ½ × 60? Yes, 30.</a:t>
+              <a:t>Next, what is 8 × 2? Yes, 16.</a:t>
             </a:r>
             <a:endParaRPr lang="en-US" sz="1050" dirty="0"/>
           </a:p>
@@ -21591,7 +21591,7 @@
                 <a:ea typeface="Hanken Grotesk" pitchFamily="34" charset="-122"/>
                 <a:cs typeface="Hanken Grotesk" pitchFamily="34" charset="-120"/>
               </a:rPr>
-              <a:t>So the area is 30 square centimeters.</a:t>
+              <a:t>Now take half: ½ × 16 = 8, so the area is 8 square centimeters.</a:t>
             </a:r>
             <a:endParaRPr lang="en-US" sz="1050" dirty="0"/>
           </a:p>
@@ -21767,7 +21767,7 @@
                 <a:ea typeface="Hanken Grotesk" pitchFamily="34" charset="-122"/>
                 <a:cs typeface="Hanken Grotesk" pitchFamily="34" charset="-120"/>
               </a:rPr>
-              <a:t>The triangular garden bed has a base of 12 feet and a height of 8 feet. Which measurement is the height, and how is it different from the slanted side?</a:t>
+              <a:t>The trapezoidal window has a top edge of 4 feet and a bottom edge of 8 feet. Why does the area formula use BOTH bases instead of just one?</a:t>
             </a:r>
             <a:endParaRPr lang="en-US" sz="1000" dirty="0"/>
           </a:p>
@@ -21879,7 +21879,7 @@
                 <a:ea typeface="Hanken Grotesk" pitchFamily="34" charset="-122"/>
                 <a:cs typeface="Hanken Grotesk" pitchFamily="34" charset="-120"/>
               </a:rPr>
-              <a:t>Area of a triangle = ½ × base × height. A triangle is exactly half of a rectangle with the same base and height.</a:t>
+              <a:t>Area of a trapezoid = ½ × (base 1 + base 2) × height. We add the two bases first, then take half.</a:t>
             </a:r>
             <a:endParaRPr lang="en-US" sz="950" dirty="0"/>
           </a:p>
